--- a/docs/Smart Guided Troubleshooting Engine.pptx
+++ b/docs/Smart Guided Troubleshooting Engine.pptx
@@ -4,6 +4,9 @@
   <p:sldMasterIdLst>
     <p:sldMasterId id="2147483648" r:id="rId1"/>
   </p:sldMasterIdLst>
+  <p:notesMasterIdLst>
+    <p:notesMasterId r:id="rId17"/>
+  </p:notesMasterIdLst>
   <p:sldIdLst>
     <p:sldId id="256" r:id="rId2"/>
     <p:sldId id="257" r:id="rId3"/>
@@ -21,9 +24,6 @@
     <p:sldId id="269" r:id="rId15"/>
     <p:sldId id="270" r:id="rId16"/>
   </p:sldIdLst>
-  <p:notesMasterIdLst>
-    <p:notesMasterId r:id="rId17"/>
-  </p:notesMasterIdLst>
   <p:sldSz cx="12192000" cy="6858000"/>
   <p:notesSz cx="6858000" cy="12192000"/>
   <p:defaultTextStyle>
@@ -118,6 +118,11 @@
       </a:defRPr>
     </a:lvl9pPr>
   </p:defaultTextStyle>
+  <p:extLst>
+    <p:ext uri="{EFAFB233-063F-42B5-8137-9DF3F51BA10A}">
+      <p15:sldGuideLst xmlns:p15="http://schemas.microsoft.com/office/powerpoint/2012/main"/>
+    </p:ext>
+  </p:extLst>
 </p:presentation>
 </file>
 
@@ -143,234 +148,10 @@
           <a:chExt cx="0" cy="0"/>
         </a:xfrm>
       </p:grpSpPr>
-      <p:sp>
-        <p:nvSpPr>
-          <p:cNvPr id="2" name="Header Placeholder 1"/>
-          <p:cNvSpPr>
-            <a:spLocks noGrp="1"/>
-          </p:cNvSpPr>
-          <p:nvPr>
-            <p:ph type="hdr" sz="quarter"/>
-          </p:nvPr>
-        </p:nvSpPr>
-        <p:spPr>
-          <a:xfrm>
-            <a:off x="0" y="0"/>
-            <a:ext cx="2971800" cy="458788"/>
-          </a:xfrm>
-          <a:prstGeom prst="rect">
-            <a:avLst/>
-          </a:prstGeom>
-        </p:spPr>
-        <p:txBody>
-          <a:bodyPr vert="horz" lIns="91440" tIns="45720" rIns="91440" bIns="45720" rtlCol="0"/>
-          <a:lstStyle>
-            <a:lvl1pPr algn="l">
-              <a:defRPr sz="1200"/>
-            </a:lvl1pPr>
-          </a:lstStyle>
-          <a:p>
-            <a:endParaRPr lang="en-US"/>
-          </a:p>
-        </p:txBody>
-      </p:sp>
-      <p:sp>
-        <p:nvSpPr>
-          <p:cNvPr id="3" name="Date Placeholder 2"/>
-          <p:cNvSpPr>
-            <a:spLocks noGrp="1"/>
-          </p:cNvSpPr>
-          <p:nvPr>
-            <p:ph type="dt" idx="1"/>
-          </p:nvPr>
-        </p:nvSpPr>
-        <p:spPr>
-          <a:xfrm>
-            <a:off x="3884613" y="0"/>
-            <a:ext cx="2971800" cy="458788"/>
-          </a:xfrm>
-          <a:prstGeom prst="rect">
-            <a:avLst/>
-          </a:prstGeom>
-        </p:spPr>
-        <p:txBody>
-          <a:bodyPr vert="horz" lIns="91440" tIns="45720" rIns="91440" bIns="45720" rtlCol="0"/>
-          <a:lstStyle>
-            <a:lvl1pPr algn="r">
-              <a:defRPr sz="1200"/>
-            </a:lvl1pPr>
-          </a:lstStyle>
-          <a:p>
-            <a:fld id="{5282F153-3F37-0F45-9E97-73ACFA13230C}" type="datetimeFigureOut">
-              <a:rPr lang="en-US"/>
-              <a:t>7/23/19</a:t>
-            </a:fld>
-            <a:endParaRPr lang="en-US"/>
-          </a:p>
-        </p:txBody>
-      </p:sp>
-      <p:sp>
-        <p:nvSpPr>
-          <p:cNvPr id="4" name="Slide Image Placeholder 3"/>
-          <p:cNvSpPr>
-            <a:spLocks noGrp="1" noRot="1" noChangeAspect="1"/>
-          </p:cNvSpPr>
-          <p:nvPr>
-            <p:ph type="sldImg" idx="2"/>
-          </p:nvPr>
-        </p:nvSpPr>
-        <p:spPr>
-          <a:xfrm>
-            <a:off x="685800" y="1143000"/>
-            <a:ext cx="5486400" cy="3086100"/>
-          </a:xfrm>
-          <a:prstGeom prst="rect">
-            <a:avLst/>
-          </a:prstGeom>
-          <a:noFill/>
-          <a:ln w="12700">
-            <a:solidFill>
-              <a:prstClr val="black"/>
-            </a:solidFill>
-          </a:ln>
-        </p:spPr>
-        <p:txBody>
-          <a:bodyPr vert="horz" lIns="91440" tIns="45720" rIns="91440" bIns="45720" rtlCol="0" anchor="ctr"/>
-          <a:lstStyle/>
-          <a:p>
-            <a:endParaRPr lang="en-US"/>
-          </a:p>
-        </p:txBody>
-      </p:sp>
-      <p:sp>
-        <p:nvSpPr>
-          <p:cNvPr id="5" name="Notes Placeholder 4"/>
-          <p:cNvSpPr>
-            <a:spLocks noGrp="1"/>
-          </p:cNvSpPr>
-          <p:nvPr>
-            <p:ph type="body" sz="quarter" idx="3"/>
-          </p:nvPr>
-        </p:nvSpPr>
-        <p:spPr>
-          <a:xfrm>
-            <a:off x="685800" y="4400550"/>
-            <a:ext cx="5486400" cy="3600450"/>
-          </a:xfrm>
-          <a:prstGeom prst="rect">
-            <a:avLst/>
-          </a:prstGeom>
-        </p:spPr>
-        <p:txBody>
-          <a:bodyPr vert="horz" lIns="91440" tIns="45720" rIns="91440" bIns="45720" rtlCol="0"/>
-          <a:lstStyle/>
-          <a:p>
-            <a:pPr lvl="0"/>
-            <a:r>
-              <a:rPr lang="en-US"/>
-              <a:t>Click to edit Master text styles</a:t>
-            </a:r>
-          </a:p>
-          <a:p>
-            <a:pPr lvl="1"/>
-            <a:r>
-              <a:rPr lang="en-US"/>
-              <a:t>Second level</a:t>
-            </a:r>
-          </a:p>
-          <a:p>
-            <a:pPr lvl="2"/>
-            <a:r>
-              <a:rPr lang="en-US"/>
-              <a:t>Third level</a:t>
-            </a:r>
-          </a:p>
-          <a:p>
-            <a:pPr lvl="3"/>
-            <a:r>
-              <a:rPr lang="en-US"/>
-              <a:t>Fourth level</a:t>
-            </a:r>
-          </a:p>
-          <a:p>
-            <a:pPr lvl="4"/>
-            <a:r>
-              <a:rPr lang="en-US"/>
-              <a:t>Fifth level</a:t>
-            </a:r>
-          </a:p>
-        </p:txBody>
-      </p:sp>
-      <p:sp>
-        <p:nvSpPr>
-          <p:cNvPr id="6" name="Footer Placeholder 5"/>
-          <p:cNvSpPr>
-            <a:spLocks noGrp="1"/>
-          </p:cNvSpPr>
-          <p:nvPr>
-            <p:ph type="ftr" sz="quarter" idx="4"/>
-          </p:nvPr>
-        </p:nvSpPr>
-        <p:spPr>
-          <a:xfrm>
-            <a:off x="0" y="8685213"/>
-            <a:ext cx="2971800" cy="458787"/>
-          </a:xfrm>
-          <a:prstGeom prst="rect">
-            <a:avLst/>
-          </a:prstGeom>
-        </p:spPr>
-        <p:txBody>
-          <a:bodyPr vert="horz" lIns="91440" tIns="45720" rIns="91440" bIns="45720" rtlCol="0" anchor="b"/>
-          <a:lstStyle>
-            <a:lvl1pPr algn="l">
-              <a:defRPr sz="1200"/>
-            </a:lvl1pPr>
-          </a:lstStyle>
-          <a:p>
-            <a:endParaRPr lang="en-US"/>
-          </a:p>
-        </p:txBody>
-      </p:sp>
-      <p:sp>
-        <p:nvSpPr>
-          <p:cNvPr id="7" name="Slide Number Placeholder 6"/>
-          <p:cNvSpPr>
-            <a:spLocks noGrp="1"/>
-          </p:cNvSpPr>
-          <p:nvPr>
-            <p:ph type="sldNum" sz="quarter" idx="5"/>
-          </p:nvPr>
-        </p:nvSpPr>
-        <p:spPr>
-          <a:xfrm>
-            <a:off x="3884613" y="8685213"/>
-            <a:ext cx="2971800" cy="458787"/>
-          </a:xfrm>
-          <a:prstGeom prst="rect">
-            <a:avLst/>
-          </a:prstGeom>
-        </p:spPr>
-        <p:txBody>
-          <a:bodyPr vert="horz" lIns="91440" tIns="45720" rIns="91440" bIns="45720" rtlCol="0" anchor="b"/>
-          <a:lstStyle>
-            <a:lvl1pPr algn="r">
-              <a:defRPr sz="1200"/>
-            </a:lvl1pPr>
-          </a:lstStyle>
-          <a:p>
-            <a:fld id="{CE5E9CC1-C706-0F49-92D6-E571CC5EEA8F}" type="slidenum">
-              <a:rPr lang="en-US"/>
-              <a:t>‹#›</a:t>
-            </a:fld>
-            <a:endParaRPr lang="en-US"/>
-          </a:p>
-        </p:txBody>
-      </p:sp>
     </p:spTree>
     <p:extLst>
       <p:ext uri="{BB962C8B-B14F-4D97-AF65-F5344CB8AC3E}">
-        <p14:creationId xmlns:p14="http://schemas.microsoft.com/office/powerpoint/2010/main" val="1024086991"/>
+        <p14:creationId xmlns:p14="http://schemas.microsoft.com/office/powerpoint/2010/main" val="3405475973"/>
       </p:ext>
     </p:extLst>
   </p:cSld>
@@ -518,7 +299,6 @@
               <a:rPr lang="en-US" dirty="0"/>
               <a:t>Introduce the team. One sentence: we turn how customers actually describe problems into a plan they can execute with one tap per step. The three colored tags are the engine's own action categories and they reappear throughout the deck.</a:t>
             </a:r>
-            <a:endParaRPr lang="en-US" dirty="0"/>
           </a:p>
         </p:txBody>
       </p:sp>
@@ -606,7 +386,6 @@
               <a:rPr lang="en-US" dirty="0"/>
               <a:t>All numbers come from our own scripts: results.jsonl, the cache benchmark and an HTTP stress test with 8 parallel workers. Fill the cold-path P95 from the paced benchmark run. Mention 100 automated tests pass.</a:t>
             </a:r>
-            <a:endParaRPr lang="en-US" dirty="0"/>
           </a:p>
         </p:txBody>
       </p:sp>
@@ -694,7 +473,6 @@
               <a:rPr lang="en-US" dirty="0"/>
               <a:t>Run on the same LLM-extracted plans. Without the gate, retrieval alone would have sent customers to the wrong screen for most settings actions. This is the evidence for our main design choice.</a:t>
             </a:r>
-            <a:endParaRPr lang="en-US" dirty="0"/>
           </a:p>
         </p:txBody>
       </p:sp>
@@ -782,7 +560,6 @@
               <a:rPr lang="en-US" dirty="0"/>
               <a:t>These came from reading our own outputs carefully. The official sample output violates the 5 to 7 word description rule, which our validator flags. The engine prefers an honest no_match over inventing a plan from an unrelated article.</a:t>
             </a:r>
-            <a:endParaRPr lang="en-US" dirty="0"/>
           </a:p>
         </p:txBody>
       </p:sp>
@@ -870,7 +647,6 @@
               <a:rPr lang="en-US" dirty="0"/>
               <a:t>The engine is a microservice. A support app or voice assistant calls it, renders the plan, and uses the deeplinks to jump straight to the right screen. The validation deeplink lets the app confirm a fix worked before moving on.</a:t>
             </a:r>
-            <a:endParaRPr lang="en-US" dirty="0"/>
           </a:p>
         </p:txBody>
       </p:sp>
@@ -958,7 +734,6 @@
               <a:rPr lang="en-US" dirty="0"/>
               <a:t>Today embeddings live in NumPy and SQLite because the data is small: 550 catalog entries and 174 cached phrasings. At company scale a vector index becomes worthwhile, and embedding all SIIS articles turns the system into full RAG.</a:t>
             </a:r>
-            <a:endParaRPr lang="en-US" dirty="0"/>
           </a:p>
         </p:txBody>
       </p:sp>
@@ -1046,7 +821,6 @@
               <a:rPr lang="en-US" dirty="0"/>
               <a:t>Offer the live demo: click a sample paraphrase for an instant cache hit, then paste a new complaint with its article to show the full pipeline, then ask it again in different words.</a:t>
             </a:r>
-            <a:endParaRPr lang="en-US" dirty="0"/>
           </a:p>
         </p:txBody>
       </p:sp>
@@ -1134,7 +908,6 @@
               <a:rPr lang="en-US" dirty="0"/>
               <a:t>Customers never speak in technical terms. Today a human reads the SIIS article, picks steps, and types instructions like Settings &gt; Display &gt; Navigation bar. The customer still has to find those menus. The problem statement puts this at about 15 minutes per scenario.</a:t>
             </a:r>
-            <a:endParaRPr lang="en-US" dirty="0"/>
           </a:p>
         </p:txBody>
       </p:sp>
@@ -1222,7 +995,6 @@
               <a:rPr lang="en-US" dirty="0"/>
               <a:t>This is a real plan the engine produced for one of the 20 test complaints. Settings toggles come first and each carries a deeplink that opens the exact screen. Physical checks come next, and disruptive steps like a factory reset are always last.</a:t>
             </a:r>
-            <a:endParaRPr lang="en-US" dirty="0"/>
           </a:p>
         </p:txBody>
       </p:sp>
@@ -1310,7 +1082,6 @@
               <a:rPr lang="en-US" dirty="0"/>
               <a:t>Most questions have been seen before, so the cache answers first. Only a genuinely new problem goes through the pipeline. Point out that the LLM appears exactly once, at extraction.</a:t>
             </a:r>
-            <a:endParaRPr lang="en-US" dirty="0"/>
           </a:p>
         </p:txBody>
       </p:sp>
@@ -1398,7 +1169,6 @@
               <a:rPr lang="en-US" dirty="0"/>
               <a:t>This is the core idea. Deeplink URIs in the catalog are masked tokens, so an LLM cannot reliably choose them and may invent realistic-looking fakes. We keep the model on the one task it is good at, reading text, and do everything checkable in code.</a:t>
             </a:r>
-            <a:endParaRPr lang="en-US" dirty="0"/>
           </a:p>
         </p:txBody>
       </p:sp>
@@ -1486,7 +1256,6 @@
               <a:rPr lang="en-US" dirty="0"/>
               <a:t>The PDF warns that prompt-only constraints are unreliable. Every rule is therefore enforced by code. The grounding example is real: the LLM added a natural follow-up step that the article never states, and the checker removed it.</a:t>
             </a:r>
-            <a:endParaRPr lang="en-US" dirty="0"/>
           </a:p>
         </p:txBody>
       </p:sp>
@@ -1574,7 +1343,6 @@
               <a:rPr lang="en-US" dirty="0"/>
               <a:t>The catalog is full of near-identical names. Letter-level fuzzy matching would accept Easy mode for Super steady mode. Our gate requires every word, in order. The backup example independently selected the same deeplink as the official sample output.</a:t>
             </a:r>
-            <a:endParaRPr lang="en-US" dirty="0"/>
           </a:p>
         </p:txBody>
       </p:sp>
@@ -1662,7 +1430,6 @@
               <a:rPr lang="en-US" dirty="0"/>
               <a:t>Customers should never be told to wipe their phone before trying a settings toggle. Within critical steps we also rank severity: restart before safe mode before factory reset.</a:t>
             </a:r>
-            <a:endParaRPr lang="en-US" dirty="0"/>
           </a:p>
         </p:txBody>
       </p:sp>
@@ -1750,7 +1517,6 @@
               <a:rPr lang="en-US" dirty="0"/>
               <a:t>The 60 test paraphrases were written by hand and never stored in the cache, so this is an honest unseen-paraphrase measurement. Lower thresholds reach 90 percent but start returning plans for complaints that should get none. Repeats are also fully deterministic, which fixes the LLM's run-to-run variation.</a:t>
             </a:r>
-            <a:endParaRPr lang="en-US" dirty="0"/>
           </a:p>
         </p:txBody>
       </p:sp>
@@ -1823,6 +1589,11 @@
 <file path=ppt/slideMasters/slideMaster1.xml><?xml version="1.0" encoding="utf-8"?>
 <p:sldMaster xmlns:a="http://schemas.openxmlformats.org/drawingml/2006/main" xmlns:r="http://schemas.openxmlformats.org/officeDocument/2006/relationships" xmlns:p="http://schemas.openxmlformats.org/presentationml/2006/main">
   <p:cSld>
+    <p:bg>
+      <p:bgRef idx="1001">
+        <a:schemeClr val="bg1"/>
+      </p:bgRef>
+    </p:bg>
     <p:spTree>
       <p:nvGrpSpPr>
         <p:cNvPr id="1" name=""/>
@@ -2105,6 +1876,7 @@
         <a:solidFill>
           <a:srgbClr val="1D1C1A"/>
         </a:solidFill>
+        <a:effectLst/>
       </p:bgPr>
     </p:bg>
     <p:spTree>
@@ -2144,14 +1916,14 @@
           </a:bodyPr>
           <a:lstStyle/>
           <a:p>
-            <a:pPr algn="l" indent="0" marL="0">
+            <a:pPr marL="0" indent="0" algn="l">
               <a:lnSpc>
                 <a:spcPts val="1680"/>
               </a:lnSpc>
               <a:buNone/>
             </a:pPr>
             <a:r>
-              <a:rPr lang="en-US" sz="1200" b="1" spc="150" kern="0" dirty="0">
+              <a:rPr lang="en-US" sz="1200" b="1" kern="0" spc="150" dirty="0">
                 <a:solidFill>
                   <a:srgbClr val="8FC9BF"/>
                 </a:solidFill>
@@ -2188,14 +1960,14 @@
           </a:bodyPr>
           <a:lstStyle/>
           <a:p>
-            <a:pPr algn="l" indent="0" marL="0">
+            <a:pPr marL="0" indent="0" algn="l">
               <a:lnSpc>
                 <a:spcPts val="7600"/>
               </a:lnSpc>
               <a:buNone/>
             </a:pPr>
             <a:r>
-              <a:rPr lang="en-US" sz="8000" b="1" spc="-200" kern="0" dirty="0">
+              <a:rPr lang="en-US" sz="8000" b="1" kern="0" spc="-200" dirty="0">
                 <a:solidFill>
                   <a:srgbClr val="F4F1EA"/>
                 </a:solidFill>
@@ -2232,7 +2004,7 @@
           </a:bodyPr>
           <a:lstStyle/>
           <a:p>
-            <a:pPr algn="l" indent="0" marL="0">
+            <a:pPr marL="0" indent="0" algn="l">
               <a:lnSpc>
                 <a:spcPts val="2430"/>
               </a:lnSpc>
@@ -2298,14 +2070,14 @@
           </a:bodyPr>
           <a:lstStyle/>
           <a:p>
-            <a:pPr algn="l" indent="0" marL="0">
+            <a:pPr marL="0" indent="0" algn="l">
               <a:lnSpc>
                 <a:spcPts val="1680"/>
               </a:lnSpc>
               <a:buNone/>
             </a:pPr>
             <a:r>
-              <a:rPr lang="en-US" sz="1200" b="1" spc="100" kern="0" dirty="0">
+              <a:rPr lang="en-US" sz="1200" b="1" kern="0" spc="100" dirty="0">
                 <a:solidFill>
                   <a:srgbClr val="F4F1EA"/>
                 </a:solidFill>
@@ -2364,14 +2136,14 @@
           </a:bodyPr>
           <a:lstStyle/>
           <a:p>
-            <a:pPr algn="l" indent="0" marL="0">
+            <a:pPr marL="0" indent="0" algn="l">
               <a:lnSpc>
                 <a:spcPts val="1680"/>
               </a:lnSpc>
               <a:buNone/>
             </a:pPr>
             <a:r>
-              <a:rPr lang="en-US" sz="1200" b="1" spc="100" kern="0" dirty="0">
+              <a:rPr lang="en-US" sz="1200" b="1" kern="0" spc="100" dirty="0">
                 <a:solidFill>
                   <a:srgbClr val="F4F1EA"/>
                 </a:solidFill>
@@ -2430,14 +2202,14 @@
           </a:bodyPr>
           <a:lstStyle/>
           <a:p>
-            <a:pPr algn="l" indent="0" marL="0">
+            <a:pPr marL="0" indent="0" algn="l">
               <a:lnSpc>
                 <a:spcPts val="1680"/>
               </a:lnSpc>
               <a:buNone/>
             </a:pPr>
             <a:r>
-              <a:rPr lang="en-US" sz="1200" b="1" spc="100" kern="0" dirty="0">
+              <a:rPr lang="en-US" sz="1200" b="1" kern="0" spc="100" dirty="0">
                 <a:solidFill>
                   <a:srgbClr val="F4F1EA"/>
                 </a:solidFill>
@@ -2474,14 +2246,14 @@
           </a:bodyPr>
           <a:lstStyle/>
           <a:p>
-            <a:pPr algn="l" indent="0" marL="0">
+            <a:pPr marL="0" indent="0" algn="l">
               <a:lnSpc>
-                <a:spcPts val="1680"/>
+                <a:spcPct val="100000"/>
               </a:lnSpc>
               <a:buNone/>
             </a:pPr>
             <a:r>
-              <a:rPr lang="en-US" sz="1200" dirty="0">
+              <a:rPr lang="en-US" sz="1200" dirty="0" err="1">
                 <a:solidFill>
                   <a:srgbClr val="BDB6A9"/>
                 </a:solidFill>
@@ -2489,7 +2261,18 @@
                 <a:ea typeface="JetBrains Mono" pitchFamily="34" charset="-122"/>
                 <a:cs typeface="JetBrains Mono" pitchFamily="34" charset="-120"/>
               </a:rPr>
-              <a:t>[Team name] · [Member A] · [Member B]</a:t>
+              <a:t>CodeSwitch</a:t>
+            </a:r>
+            <a:r>
+              <a:rPr lang="en-US" sz="1200" dirty="0">
+                <a:solidFill>
+                  <a:srgbClr val="BDB6A9"/>
+                </a:solidFill>
+                <a:latin typeface="JetBrains Mono" pitchFamily="34" charset="0"/>
+                <a:ea typeface="JetBrains Mono" pitchFamily="34" charset="-122"/>
+                <a:cs typeface="JetBrains Mono" pitchFamily="34" charset="-120"/>
+              </a:rPr>
+              <a:t> - Rayasam Amarnath · Neeraj Prasad</a:t>
             </a:r>
             <a:endParaRPr lang="en-US" sz="1200" dirty="0"/>
           </a:p>
@@ -2511,6 +2294,7 @@
         <a:solidFill>
           <a:srgbClr val="F4F1EA"/>
         </a:solidFill>
+        <a:effectLst/>
       </p:bgPr>
     </p:bg>
     <p:spTree>
@@ -2550,14 +2334,14 @@
           </a:bodyPr>
           <a:lstStyle/>
           <a:p>
-            <a:pPr algn="l" indent="0" marL="0">
+            <a:pPr marL="0" indent="0" algn="l">
               <a:lnSpc>
                 <a:spcPts val="1680"/>
               </a:lnSpc>
               <a:buNone/>
             </a:pPr>
             <a:r>
-              <a:rPr lang="en-US" sz="1200" b="1" spc="150" kern="0" dirty="0">
+              <a:rPr lang="en-US" sz="1200" b="1" kern="0" spc="150" dirty="0">
                 <a:solidFill>
                   <a:srgbClr val="0F766E"/>
                 </a:solidFill>
@@ -2594,14 +2378,14 @@
           </a:bodyPr>
           <a:lstStyle/>
           <a:p>
-            <a:pPr algn="l" indent="0" marL="0">
+            <a:pPr marL="0" indent="0" algn="l">
               <a:lnSpc>
                 <a:spcPts val="3520"/>
               </a:lnSpc>
               <a:buNone/>
             </a:pPr>
             <a:r>
-              <a:rPr lang="en-US" sz="3200" b="1" spc="-50" kern="0" dirty="0">
+              <a:rPr lang="en-US" sz="3200" b="1" kern="0" spc="-50" dirty="0">
                 <a:solidFill>
                   <a:srgbClr val="1D1C1A"/>
                 </a:solidFill>
@@ -2651,16 +2435,34 @@
         </p:nvGraphicFramePr>
         <p:xfrm>
           <a:off x="825500" y="1892201"/>
-          <a:ext cx="10553700" cy="3592711"/>
+          <a:ext cx="10553700" cy="3592710"/>
         </p:xfrm>
         <a:graphic>
           <a:graphicData uri="http://schemas.openxmlformats.org/drawingml/2006/table">
             <a:tbl>
               <a:tblPr/>
               <a:tblGrid>
-                <a:gridCol w="6121146"/>
-                <a:gridCol w="1899666"/>
-                <a:gridCol w="2532888"/>
+                <a:gridCol w="6121146">
+                  <a:extLst>
+                    <a:ext uri="{9D8B030D-6E8A-4147-A177-3AD203B41FA5}">
+                      <a16:colId xmlns:a16="http://schemas.microsoft.com/office/drawing/2014/main" val="20000"/>
+                    </a:ext>
+                  </a:extLst>
+                </a:gridCol>
+                <a:gridCol w="1899666">
+                  <a:extLst>
+                    <a:ext uri="{9D8B030D-6E8A-4147-A177-3AD203B41FA5}">
+                      <a16:colId xmlns:a16="http://schemas.microsoft.com/office/drawing/2014/main" val="20001"/>
+                    </a:ext>
+                  </a:extLst>
+                </a:gridCol>
+                <a:gridCol w="2532888">
+                  <a:extLst>
+                    <a:ext uri="{9D8B030D-6E8A-4147-A177-3AD203B41FA5}">
+                      <a16:colId xmlns:a16="http://schemas.microsoft.com/office/drawing/2014/main" val="20002"/>
+                    </a:ext>
+                  </a:extLst>
+                </a:gridCol>
               </a:tblGrid>
               <a:tr h="359271">
                 <a:tc>
@@ -2668,7 +2470,7 @@
                     <a:bodyPr/>
                     <a:lstStyle/>
                     <a:p>
-                      <a:pPr indent="0" marL="0">
+                      <a:pPr marL="0" indent="0">
                         <a:lnSpc>
                           <a:spcPts val="1820"/>
                         </a:lnSpc>
@@ -2692,7 +2494,7 @@
                       </a:endParaRPr>
                     </a:p>
                   </a:txBody>
-                  <a:tcPr marL="57785" marR="57785" marT="57785" marB="57785" anchor="t">
+                  <a:tcPr marL="57785" marR="57785" marT="57785" marB="57785">
                     <a:lnL w="12700" cap="flat" cmpd="sng" algn="ctr">
                       <a:solidFill>
                         <a:srgbClr val="CBCAC6"/>
@@ -2739,7 +2541,7 @@
                     <a:bodyPr/>
                     <a:lstStyle/>
                     <a:p>
-                      <a:pPr indent="0" marL="0">
+                      <a:pPr marL="0" indent="0">
                         <a:lnSpc>
                           <a:spcPts val="1820"/>
                         </a:lnSpc>
@@ -2763,7 +2565,7 @@
                       </a:endParaRPr>
                     </a:p>
                   </a:txBody>
-                  <a:tcPr marL="57785" marR="57785" marT="57785" marB="57785" anchor="t">
+                  <a:tcPr marL="57785" marR="57785" marT="57785" marB="57785">
                     <a:lnL w="12700" cap="flat" cmpd="sng" algn="ctr">
                       <a:solidFill>
                         <a:srgbClr val="1B1A18"/>
@@ -2810,7 +2612,7 @@
                     <a:bodyPr/>
                     <a:lstStyle/>
                     <a:p>
-                      <a:pPr indent="0" marL="0">
+                      <a:pPr marL="0" indent="0">
                         <a:lnSpc>
                           <a:spcPts val="1820"/>
                         </a:lnSpc>
@@ -2834,7 +2636,7 @@
                       </a:endParaRPr>
                     </a:p>
                   </a:txBody>
-                  <a:tcPr marL="57785" marR="57785" marT="57785" marB="57785" anchor="t">
+                  <a:tcPr marL="57785" marR="57785" marT="57785" marB="57785">
                     <a:lnL w="12700" cap="flat" cmpd="sng" algn="ctr">
                       <a:solidFill>
                         <a:srgbClr val="1B1A18"/>
@@ -2876,6 +2678,11 @@
                     </a:solidFill>
                   </a:tcPr>
                 </a:tc>
+                <a:extLst>
+                  <a:ext uri="{0D108BD9-81ED-4DB2-BD59-A6C34878D82A}">
+                    <a16:rowId xmlns:a16="http://schemas.microsoft.com/office/drawing/2014/main" val="10000"/>
+                  </a:ext>
+                </a:extLst>
               </a:tr>
               <a:tr h="359271">
                 <a:tc>
@@ -2883,7 +2690,7 @@
                     <a:bodyPr/>
                     <a:lstStyle/>
                     <a:p>
-                      <a:pPr indent="0" marL="0">
+                      <a:pPr marL="0" indent="0">
                         <a:lnSpc>
                           <a:spcPts val="1820"/>
                         </a:lnSpc>
@@ -2907,7 +2714,7 @@
                       </a:endParaRPr>
                     </a:p>
                   </a:txBody>
-                  <a:tcPr marL="57785" marR="57785" marT="57785" marB="57785" anchor="t">
+                  <a:tcPr marL="57785" marR="57785" marT="57785" marB="57785">
                     <a:lnL w="12700" cap="flat" cmpd="sng" algn="ctr">
                       <a:solidFill>
                         <a:srgbClr val="CBCAC6"/>
@@ -2951,7 +2758,7 @@
                     <a:bodyPr/>
                     <a:lstStyle/>
                     <a:p>
-                      <a:pPr indent="0" marL="0">
+                      <a:pPr marL="0" indent="0">
                         <a:lnSpc>
                           <a:spcPts val="1820"/>
                         </a:lnSpc>
@@ -2975,7 +2782,7 @@
                       </a:endParaRPr>
                     </a:p>
                   </a:txBody>
-                  <a:tcPr marL="57785" marR="57785" marT="57785" marB="57785" anchor="t">
+                  <a:tcPr marL="57785" marR="57785" marT="57785" marB="57785">
                     <a:lnL w="12700" cap="flat" cmpd="sng" algn="ctr">
                       <a:solidFill>
                         <a:srgbClr val="CBCAC6"/>
@@ -3019,7 +2826,7 @@
                     <a:bodyPr/>
                     <a:lstStyle/>
                     <a:p>
-                      <a:pPr indent="0" marL="0">
+                      <a:pPr marL="0" indent="0">
                         <a:lnSpc>
                           <a:spcPts val="1820"/>
                         </a:lnSpc>
@@ -3043,7 +2850,7 @@
                       </a:endParaRPr>
                     </a:p>
                   </a:txBody>
-                  <a:tcPr marL="57785" marR="57785" marT="57785" marB="57785" anchor="t">
+                  <a:tcPr marL="57785" marR="57785" marT="57785" marB="57785">
                     <a:lnL w="12700" cap="flat" cmpd="sng" algn="ctr">
                       <a:solidFill>
                         <a:srgbClr val="CBCAC6"/>
@@ -3082,6 +2889,11 @@
                     </a:lnB>
                   </a:tcPr>
                 </a:tc>
+                <a:extLst>
+                  <a:ext uri="{0D108BD9-81ED-4DB2-BD59-A6C34878D82A}">
+                    <a16:rowId xmlns:a16="http://schemas.microsoft.com/office/drawing/2014/main" val="10001"/>
+                  </a:ext>
+                </a:extLst>
               </a:tr>
               <a:tr h="359271">
                 <a:tc>
@@ -3089,7 +2901,7 @@
                     <a:bodyPr/>
                     <a:lstStyle/>
                     <a:p>
-                      <a:pPr indent="0" marL="0">
+                      <a:pPr marL="0" indent="0">
                         <a:lnSpc>
                           <a:spcPts val="1820"/>
                         </a:lnSpc>
@@ -3113,7 +2925,7 @@
                       </a:endParaRPr>
                     </a:p>
                   </a:txBody>
-                  <a:tcPr marL="57785" marR="57785" marT="57785" marB="57785" anchor="t">
+                  <a:tcPr marL="57785" marR="57785" marT="57785" marB="57785">
                     <a:lnL w="12700" cap="flat" cmpd="sng" algn="ctr">
                       <a:solidFill>
                         <a:srgbClr val="CBCAC6"/>
@@ -3157,7 +2969,7 @@
                     <a:bodyPr/>
                     <a:lstStyle/>
                     <a:p>
-                      <a:pPr indent="0" marL="0">
+                      <a:pPr marL="0" indent="0">
                         <a:lnSpc>
                           <a:spcPts val="1820"/>
                         </a:lnSpc>
@@ -3181,7 +2993,7 @@
                       </a:endParaRPr>
                     </a:p>
                   </a:txBody>
-                  <a:tcPr marL="57785" marR="57785" marT="57785" marB="57785" anchor="t">
+                  <a:tcPr marL="57785" marR="57785" marT="57785" marB="57785">
                     <a:lnL w="12700" cap="flat" cmpd="sng" algn="ctr">
                       <a:solidFill>
                         <a:srgbClr val="CBCAC6"/>
@@ -3225,7 +3037,7 @@
                     <a:bodyPr/>
                     <a:lstStyle/>
                     <a:p>
-                      <a:pPr indent="0" marL="0">
+                      <a:pPr marL="0" indent="0">
                         <a:lnSpc>
                           <a:spcPts val="1820"/>
                         </a:lnSpc>
@@ -3249,7 +3061,7 @@
                       </a:endParaRPr>
                     </a:p>
                   </a:txBody>
-                  <a:tcPr marL="57785" marR="57785" marT="57785" marB="57785" anchor="t">
+                  <a:tcPr marL="57785" marR="57785" marT="57785" marB="57785">
                     <a:lnL w="12700" cap="flat" cmpd="sng" algn="ctr">
                       <a:solidFill>
                         <a:srgbClr val="CBCAC6"/>
@@ -3288,6 +3100,11 @@
                     </a:lnB>
                   </a:tcPr>
                 </a:tc>
+                <a:extLst>
+                  <a:ext uri="{0D108BD9-81ED-4DB2-BD59-A6C34878D82A}">
+                    <a16:rowId xmlns:a16="http://schemas.microsoft.com/office/drawing/2014/main" val="10002"/>
+                  </a:ext>
+                </a:extLst>
               </a:tr>
               <a:tr h="359271">
                 <a:tc>
@@ -3295,7 +3112,7 @@
                     <a:bodyPr/>
                     <a:lstStyle/>
                     <a:p>
-                      <a:pPr indent="0" marL="0">
+                      <a:pPr marL="0" indent="0">
                         <a:lnSpc>
                           <a:spcPts val="1820"/>
                         </a:lnSpc>
@@ -3319,7 +3136,7 @@
                       </a:endParaRPr>
                     </a:p>
                   </a:txBody>
-                  <a:tcPr marL="57785" marR="57785" marT="57785" marB="57785" anchor="t">
+                  <a:tcPr marL="57785" marR="57785" marT="57785" marB="57785">
                     <a:lnL w="12700" cap="flat" cmpd="sng" algn="ctr">
                       <a:solidFill>
                         <a:srgbClr val="CBCAC6"/>
@@ -3363,7 +3180,7 @@
                     <a:bodyPr/>
                     <a:lstStyle/>
                     <a:p>
-                      <a:pPr indent="0" marL="0">
+                      <a:pPr marL="0" indent="0">
                         <a:lnSpc>
                           <a:spcPts val="1820"/>
                         </a:lnSpc>
@@ -3387,7 +3204,7 @@
                       </a:endParaRPr>
                     </a:p>
                   </a:txBody>
-                  <a:tcPr marL="57785" marR="57785" marT="57785" marB="57785" anchor="t">
+                  <a:tcPr marL="57785" marR="57785" marT="57785" marB="57785">
                     <a:lnL w="12700" cap="flat" cmpd="sng" algn="ctr">
                       <a:solidFill>
                         <a:srgbClr val="CBCAC6"/>
@@ -3431,7 +3248,7 @@
                     <a:bodyPr/>
                     <a:lstStyle/>
                     <a:p>
-                      <a:pPr indent="0" marL="0">
+                      <a:pPr marL="0" indent="0">
                         <a:lnSpc>
                           <a:spcPts val="1820"/>
                         </a:lnSpc>
@@ -3455,7 +3272,7 @@
                       </a:endParaRPr>
                     </a:p>
                   </a:txBody>
-                  <a:tcPr marL="57785" marR="57785" marT="57785" marB="57785" anchor="t">
+                  <a:tcPr marL="57785" marR="57785" marT="57785" marB="57785">
                     <a:lnL w="12700" cap="flat" cmpd="sng" algn="ctr">
                       <a:solidFill>
                         <a:srgbClr val="CBCAC6"/>
@@ -3494,6 +3311,11 @@
                     </a:lnB>
                   </a:tcPr>
                 </a:tc>
+                <a:extLst>
+                  <a:ext uri="{0D108BD9-81ED-4DB2-BD59-A6C34878D82A}">
+                    <a16:rowId xmlns:a16="http://schemas.microsoft.com/office/drawing/2014/main" val="10003"/>
+                  </a:ext>
+                </a:extLst>
               </a:tr>
               <a:tr h="359271">
                 <a:tc>
@@ -3501,7 +3323,7 @@
                     <a:bodyPr/>
                     <a:lstStyle/>
                     <a:p>
-                      <a:pPr indent="0" marL="0">
+                      <a:pPr marL="0" indent="0">
                         <a:lnSpc>
                           <a:spcPts val="1820"/>
                         </a:lnSpc>
@@ -3525,7 +3347,7 @@
                       </a:endParaRPr>
                     </a:p>
                   </a:txBody>
-                  <a:tcPr marL="57785" marR="57785" marT="57785" marB="57785" anchor="t">
+                  <a:tcPr marL="57785" marR="57785" marT="57785" marB="57785">
                     <a:lnL w="12700" cap="flat" cmpd="sng" algn="ctr">
                       <a:solidFill>
                         <a:srgbClr val="CBCAC6"/>
@@ -3569,7 +3391,7 @@
                     <a:bodyPr/>
                     <a:lstStyle/>
                     <a:p>
-                      <a:pPr indent="0" marL="0">
+                      <a:pPr marL="0" indent="0">
                         <a:lnSpc>
                           <a:spcPts val="1820"/>
                         </a:lnSpc>
@@ -3593,7 +3415,7 @@
                       </a:endParaRPr>
                     </a:p>
                   </a:txBody>
-                  <a:tcPr marL="57785" marR="57785" marT="57785" marB="57785" anchor="t">
+                  <a:tcPr marL="57785" marR="57785" marT="57785" marB="57785">
                     <a:lnL w="12700" cap="flat" cmpd="sng" algn="ctr">
                       <a:solidFill>
                         <a:srgbClr val="CBCAC6"/>
@@ -3637,7 +3459,7 @@
                     <a:bodyPr/>
                     <a:lstStyle/>
                     <a:p>
-                      <a:pPr indent="0" marL="0">
+                      <a:pPr marL="0" indent="0">
                         <a:lnSpc>
                           <a:spcPts val="1820"/>
                         </a:lnSpc>
@@ -3661,7 +3483,7 @@
                       </a:endParaRPr>
                     </a:p>
                   </a:txBody>
-                  <a:tcPr marL="57785" marR="57785" marT="57785" marB="57785" anchor="t">
+                  <a:tcPr marL="57785" marR="57785" marT="57785" marB="57785">
                     <a:lnL w="12700" cap="flat" cmpd="sng" algn="ctr">
                       <a:solidFill>
                         <a:srgbClr val="CBCAC6"/>
@@ -3700,6 +3522,11 @@
                     </a:lnB>
                   </a:tcPr>
                 </a:tc>
+                <a:extLst>
+                  <a:ext uri="{0D108BD9-81ED-4DB2-BD59-A6C34878D82A}">
+                    <a16:rowId xmlns:a16="http://schemas.microsoft.com/office/drawing/2014/main" val="10004"/>
+                  </a:ext>
+                </a:extLst>
               </a:tr>
               <a:tr h="359271">
                 <a:tc>
@@ -3707,7 +3534,7 @@
                     <a:bodyPr/>
                     <a:lstStyle/>
                     <a:p>
-                      <a:pPr indent="0" marL="0">
+                      <a:pPr marL="0" indent="0">
                         <a:lnSpc>
                           <a:spcPts val="1820"/>
                         </a:lnSpc>
@@ -3731,7 +3558,7 @@
                       </a:endParaRPr>
                     </a:p>
                   </a:txBody>
-                  <a:tcPr marL="57785" marR="57785" marT="57785" marB="57785" anchor="t">
+                  <a:tcPr marL="57785" marR="57785" marT="57785" marB="57785">
                     <a:lnL w="12700" cap="flat" cmpd="sng" algn="ctr">
                       <a:solidFill>
                         <a:srgbClr val="CBCAC6"/>
@@ -3775,7 +3602,7 @@
                     <a:bodyPr/>
                     <a:lstStyle/>
                     <a:p>
-                      <a:pPr indent="0" marL="0">
+                      <a:pPr marL="0" indent="0">
                         <a:lnSpc>
                           <a:spcPts val="1820"/>
                         </a:lnSpc>
@@ -3799,7 +3626,7 @@
                       </a:endParaRPr>
                     </a:p>
                   </a:txBody>
-                  <a:tcPr marL="57785" marR="57785" marT="57785" marB="57785" anchor="t">
+                  <a:tcPr marL="57785" marR="57785" marT="57785" marB="57785">
                     <a:lnL w="12700" cap="flat" cmpd="sng" algn="ctr">
                       <a:solidFill>
                         <a:srgbClr val="CBCAC6"/>
@@ -3843,7 +3670,7 @@
                     <a:bodyPr/>
                     <a:lstStyle/>
                     <a:p>
-                      <a:pPr indent="0" marL="0">
+                      <a:pPr marL="0" indent="0">
                         <a:lnSpc>
                           <a:spcPts val="1820"/>
                         </a:lnSpc>
@@ -3867,7 +3694,7 @@
                       </a:endParaRPr>
                     </a:p>
                   </a:txBody>
-                  <a:tcPr marL="57785" marR="57785" marT="57785" marB="57785" anchor="t">
+                  <a:tcPr marL="57785" marR="57785" marT="57785" marB="57785">
                     <a:lnL w="12700" cap="flat" cmpd="sng" algn="ctr">
                       <a:solidFill>
                         <a:srgbClr val="CBCAC6"/>
@@ -3906,6 +3733,11 @@
                     </a:lnB>
                   </a:tcPr>
                 </a:tc>
+                <a:extLst>
+                  <a:ext uri="{0D108BD9-81ED-4DB2-BD59-A6C34878D82A}">
+                    <a16:rowId xmlns:a16="http://schemas.microsoft.com/office/drawing/2014/main" val="10005"/>
+                  </a:ext>
+                </a:extLst>
               </a:tr>
               <a:tr h="359271">
                 <a:tc>
@@ -3913,7 +3745,7 @@
                     <a:bodyPr/>
                     <a:lstStyle/>
                     <a:p>
-                      <a:pPr indent="0" marL="0">
+                      <a:pPr marL="0" indent="0">
                         <a:lnSpc>
                           <a:spcPts val="1820"/>
                         </a:lnSpc>
@@ -3937,7 +3769,7 @@
                       </a:endParaRPr>
                     </a:p>
                   </a:txBody>
-                  <a:tcPr marL="57785" marR="57785" marT="57785" marB="57785" anchor="t">
+                  <a:tcPr marL="57785" marR="57785" marT="57785" marB="57785">
                     <a:lnL w="12700" cap="flat" cmpd="sng" algn="ctr">
                       <a:solidFill>
                         <a:srgbClr val="CBCAC6"/>
@@ -3981,7 +3813,7 @@
                     <a:bodyPr/>
                     <a:lstStyle/>
                     <a:p>
-                      <a:pPr indent="0" marL="0">
+                      <a:pPr marL="0" indent="0">
                         <a:lnSpc>
                           <a:spcPts val="1820"/>
                         </a:lnSpc>
@@ -4005,7 +3837,7 @@
                       </a:endParaRPr>
                     </a:p>
                   </a:txBody>
-                  <a:tcPr marL="57785" marR="57785" marT="57785" marB="57785" anchor="t">
+                  <a:tcPr marL="57785" marR="57785" marT="57785" marB="57785">
                     <a:lnL w="12700" cap="flat" cmpd="sng" algn="ctr">
                       <a:solidFill>
                         <a:srgbClr val="CBCAC6"/>
@@ -4049,7 +3881,7 @@
                     <a:bodyPr/>
                     <a:lstStyle/>
                     <a:p>
-                      <a:pPr indent="0" marL="0">
+                      <a:pPr marL="0" indent="0">
                         <a:lnSpc>
                           <a:spcPts val="1820"/>
                         </a:lnSpc>
@@ -4073,7 +3905,7 @@
                       </a:endParaRPr>
                     </a:p>
                   </a:txBody>
-                  <a:tcPr marL="57785" marR="57785" marT="57785" marB="57785" anchor="t">
+                  <a:tcPr marL="57785" marR="57785" marT="57785" marB="57785">
                     <a:lnL w="12700" cap="flat" cmpd="sng" algn="ctr">
                       <a:solidFill>
                         <a:srgbClr val="CBCAC6"/>
@@ -4112,6 +3944,11 @@
                     </a:lnB>
                   </a:tcPr>
                 </a:tc>
+                <a:extLst>
+                  <a:ext uri="{0D108BD9-81ED-4DB2-BD59-A6C34878D82A}">
+                    <a16:rowId xmlns:a16="http://schemas.microsoft.com/office/drawing/2014/main" val="10006"/>
+                  </a:ext>
+                </a:extLst>
               </a:tr>
               <a:tr h="359271">
                 <a:tc>
@@ -4119,7 +3956,7 @@
                     <a:bodyPr/>
                     <a:lstStyle/>
                     <a:p>
-                      <a:pPr indent="0" marL="0">
+                      <a:pPr marL="0" indent="0">
                         <a:lnSpc>
                           <a:spcPts val="1820"/>
                         </a:lnSpc>
@@ -4143,7 +3980,7 @@
                       </a:endParaRPr>
                     </a:p>
                   </a:txBody>
-                  <a:tcPr marL="57785" marR="57785" marT="57785" marB="57785" anchor="t">
+                  <a:tcPr marL="57785" marR="57785" marT="57785" marB="57785">
                     <a:lnL w="12700" cap="flat" cmpd="sng" algn="ctr">
                       <a:solidFill>
                         <a:srgbClr val="CBCAC6"/>
@@ -4187,7 +4024,7 @@
                     <a:bodyPr/>
                     <a:lstStyle/>
                     <a:p>
-                      <a:pPr indent="0" marL="0">
+                      <a:pPr marL="0" indent="0">
                         <a:lnSpc>
                           <a:spcPts val="1820"/>
                         </a:lnSpc>
@@ -4211,7 +4048,7 @@
                       </a:endParaRPr>
                     </a:p>
                   </a:txBody>
-                  <a:tcPr marL="57785" marR="57785" marT="57785" marB="57785" anchor="t">
+                  <a:tcPr marL="57785" marR="57785" marT="57785" marB="57785">
                     <a:lnL w="12700" cap="flat" cmpd="sng" algn="ctr">
                       <a:solidFill>
                         <a:srgbClr val="CBCAC6"/>
@@ -4255,7 +4092,7 @@
                     <a:bodyPr/>
                     <a:lstStyle/>
                     <a:p>
-                      <a:pPr indent="0" marL="0">
+                      <a:pPr marL="0" indent="0">
                         <a:lnSpc>
                           <a:spcPts val="1820"/>
                         </a:lnSpc>
@@ -4279,7 +4116,7 @@
                       </a:endParaRPr>
                     </a:p>
                   </a:txBody>
-                  <a:tcPr marL="57785" marR="57785" marT="57785" marB="57785" anchor="t">
+                  <a:tcPr marL="57785" marR="57785" marT="57785" marB="57785">
                     <a:lnL w="12700" cap="flat" cmpd="sng" algn="ctr">
                       <a:solidFill>
                         <a:srgbClr val="CBCAC6"/>
@@ -4318,6 +4155,11 @@
                     </a:lnB>
                   </a:tcPr>
                 </a:tc>
+                <a:extLst>
+                  <a:ext uri="{0D108BD9-81ED-4DB2-BD59-A6C34878D82A}">
+                    <a16:rowId xmlns:a16="http://schemas.microsoft.com/office/drawing/2014/main" val="10007"/>
+                  </a:ext>
+                </a:extLst>
               </a:tr>
               <a:tr h="359271">
                 <a:tc>
@@ -4325,7 +4167,7 @@
                     <a:bodyPr/>
                     <a:lstStyle/>
                     <a:p>
-                      <a:pPr indent="0" marL="0">
+                      <a:pPr marL="0" indent="0">
                         <a:lnSpc>
                           <a:spcPts val="1820"/>
                         </a:lnSpc>
@@ -4349,7 +4191,7 @@
                       </a:endParaRPr>
                     </a:p>
                   </a:txBody>
-                  <a:tcPr marL="57785" marR="57785" marT="57785" marB="57785" anchor="t">
+                  <a:tcPr marL="57785" marR="57785" marT="57785" marB="57785">
                     <a:lnL w="12700" cap="flat" cmpd="sng" algn="ctr">
                       <a:solidFill>
                         <a:srgbClr val="CBCAC6"/>
@@ -4393,7 +4235,7 @@
                     <a:bodyPr/>
                     <a:lstStyle/>
                     <a:p>
-                      <a:pPr indent="0" marL="0">
+                      <a:pPr marL="0" indent="0">
                         <a:lnSpc>
                           <a:spcPts val="1820"/>
                         </a:lnSpc>
@@ -4417,7 +4259,7 @@
                       </a:endParaRPr>
                     </a:p>
                   </a:txBody>
-                  <a:tcPr marL="57785" marR="57785" marT="57785" marB="57785" anchor="t">
+                  <a:tcPr marL="57785" marR="57785" marT="57785" marB="57785">
                     <a:lnL w="12700" cap="flat" cmpd="sng" algn="ctr">
                       <a:solidFill>
                         <a:srgbClr val="CBCAC6"/>
@@ -4461,7 +4303,7 @@
                     <a:bodyPr/>
                     <a:lstStyle/>
                     <a:p>
-                      <a:pPr indent="0" marL="0">
+                      <a:pPr marL="0" indent="0">
                         <a:lnSpc>
                           <a:spcPts val="1820"/>
                         </a:lnSpc>
@@ -4485,7 +4327,7 @@
                       </a:endParaRPr>
                     </a:p>
                   </a:txBody>
-                  <a:tcPr marL="57785" marR="57785" marT="57785" marB="57785" anchor="t">
+                  <a:tcPr marL="57785" marR="57785" marT="57785" marB="57785">
                     <a:lnL w="12700" cap="flat" cmpd="sng" algn="ctr">
                       <a:solidFill>
                         <a:srgbClr val="CBCAC6"/>
@@ -4524,6 +4366,11 @@
                     </a:lnB>
                   </a:tcPr>
                 </a:tc>
+                <a:extLst>
+                  <a:ext uri="{0D108BD9-81ED-4DB2-BD59-A6C34878D82A}">
+                    <a16:rowId xmlns:a16="http://schemas.microsoft.com/office/drawing/2014/main" val="10008"/>
+                  </a:ext>
+                </a:extLst>
               </a:tr>
               <a:tr h="359271">
                 <a:tc>
@@ -4531,7 +4378,7 @@
                     <a:bodyPr/>
                     <a:lstStyle/>
                     <a:p>
-                      <a:pPr indent="0" marL="0">
+                      <a:pPr marL="0" indent="0">
                         <a:lnSpc>
                           <a:spcPts val="1820"/>
                         </a:lnSpc>
@@ -4555,7 +4402,7 @@
                       </a:endParaRPr>
                     </a:p>
                   </a:txBody>
-                  <a:tcPr marL="57785" marR="57785" marT="57785" marB="57785" anchor="t">
+                  <a:tcPr marL="57785" marR="57785" marT="57785" marB="57785">
                     <a:lnL w="12700" cap="flat" cmpd="sng" algn="ctr">
                       <a:solidFill>
                         <a:srgbClr val="CBCAC6"/>
@@ -4599,7 +4446,7 @@
                     <a:bodyPr/>
                     <a:lstStyle/>
                     <a:p>
-                      <a:pPr indent="0" marL="0">
+                      <a:pPr marL="0" indent="0">
                         <a:lnSpc>
                           <a:spcPts val="1820"/>
                         </a:lnSpc>
@@ -4623,7 +4470,7 @@
                       </a:endParaRPr>
                     </a:p>
                   </a:txBody>
-                  <a:tcPr marL="57785" marR="57785" marT="57785" marB="57785" anchor="t">
+                  <a:tcPr marL="57785" marR="57785" marT="57785" marB="57785">
                     <a:lnL w="12700" cap="flat" cmpd="sng" algn="ctr">
                       <a:solidFill>
                         <a:srgbClr val="CBCAC6"/>
@@ -4667,7 +4514,7 @@
                     <a:bodyPr/>
                     <a:lstStyle/>
                     <a:p>
-                      <a:pPr indent="0" marL="0">
+                      <a:pPr marL="0" indent="0">
                         <a:lnSpc>
                           <a:spcPts val="1820"/>
                         </a:lnSpc>
@@ -4691,7 +4538,7 @@
                       </a:endParaRPr>
                     </a:p>
                   </a:txBody>
-                  <a:tcPr marL="57785" marR="57785" marT="57785" marB="57785" anchor="t">
+                  <a:tcPr marL="57785" marR="57785" marT="57785" marB="57785">
                     <a:lnL w="12700" cap="flat" cmpd="sng" algn="ctr">
                       <a:solidFill>
                         <a:srgbClr val="CBCAC6"/>
@@ -4730,6 +4577,11 @@
                     </a:lnB>
                   </a:tcPr>
                 </a:tc>
+                <a:extLst>
+                  <a:ext uri="{0D108BD9-81ED-4DB2-BD59-A6C34878D82A}">
+                    <a16:rowId xmlns:a16="http://schemas.microsoft.com/office/drawing/2014/main" val="10009"/>
+                  </a:ext>
+                </a:extLst>
               </a:tr>
             </a:tbl>
           </a:graphicData>
@@ -4758,7 +4610,7 @@
           </a:bodyPr>
           <a:lstStyle/>
           <a:p>
-            <a:pPr algn="l" indent="0" marL="0">
+            <a:pPr marL="0" indent="0" algn="l">
               <a:lnSpc>
                 <a:spcPts val="1680"/>
               </a:lnSpc>
@@ -4802,7 +4654,7 @@
           </a:bodyPr>
           <a:lstStyle/>
           <a:p>
-            <a:pPr algn="r" indent="0" marL="0">
+            <a:pPr marL="0" indent="0" algn="r">
               <a:lnSpc>
                 <a:spcPts val="1680"/>
               </a:lnSpc>
@@ -4839,6 +4691,7 @@
         <a:solidFill>
           <a:srgbClr val="F4F1EA"/>
         </a:solidFill>
+        <a:effectLst/>
       </p:bgPr>
     </p:bg>
     <p:spTree>
@@ -4878,14 +4731,14 @@
           </a:bodyPr>
           <a:lstStyle/>
           <a:p>
-            <a:pPr algn="l" indent="0" marL="0">
+            <a:pPr marL="0" indent="0" algn="l">
               <a:lnSpc>
                 <a:spcPts val="1680"/>
               </a:lnSpc>
               <a:buNone/>
             </a:pPr>
             <a:r>
-              <a:rPr lang="en-US" sz="1200" b="1" spc="150" kern="0" dirty="0">
+              <a:rPr lang="en-US" sz="1200" b="1" kern="0" spc="150" dirty="0">
                 <a:solidFill>
                   <a:srgbClr val="0F766E"/>
                 </a:solidFill>
@@ -4922,14 +4775,14 @@
           </a:bodyPr>
           <a:lstStyle/>
           <a:p>
-            <a:pPr algn="l" indent="0" marL="0">
+            <a:pPr marL="0" indent="0" algn="l">
               <a:lnSpc>
                 <a:spcPts val="3520"/>
               </a:lnSpc>
               <a:buNone/>
             </a:pPr>
             <a:r>
-              <a:rPr lang="en-US" sz="3200" b="1" spc="-50" kern="0" dirty="0">
+              <a:rPr lang="en-US" sz="3200" b="1" kern="0" spc="-50" dirty="0">
                 <a:solidFill>
                   <a:srgbClr val="1D1C1A"/>
                 </a:solidFill>
@@ -4966,14 +4819,14 @@
           </a:bodyPr>
           <a:lstStyle/>
           <a:p>
-            <a:pPr algn="l" indent="0" marL="0">
+            <a:pPr marL="0" indent="0" algn="l">
               <a:lnSpc>
                 <a:spcPts val="8000"/>
               </a:lnSpc>
               <a:buNone/>
             </a:pPr>
             <a:r>
-              <a:rPr lang="en-US" sz="8000" b="1" spc="-200" kern="0" dirty="0">
+              <a:rPr lang="en-US" sz="8000" b="1" kern="0" spc="-200" dirty="0">
                 <a:solidFill>
                   <a:srgbClr val="B91C1C"/>
                 </a:solidFill>
@@ -5010,7 +4863,7 @@
           </a:bodyPr>
           <a:lstStyle/>
           <a:p>
-            <a:pPr algn="l" indent="0" marL="0">
+            <a:pPr marL="0" indent="0" algn="l">
               <a:lnSpc>
                 <a:spcPts val="1960"/>
               </a:lnSpc>
@@ -5067,15 +4920,27 @@
         </p:nvGraphicFramePr>
         <p:xfrm>
           <a:off x="4635500" y="1892201"/>
-          <a:ext cx="6743700" cy="2258516"/>
+          <a:ext cx="6743700" cy="2258517"/>
         </p:xfrm>
         <a:graphic>
           <a:graphicData uri="http://schemas.openxmlformats.org/drawingml/2006/table">
             <a:tbl>
               <a:tblPr/>
               <a:tblGrid>
-                <a:gridCol w="2967228"/>
-                <a:gridCol w="3776472"/>
+                <a:gridCol w="2967228">
+                  <a:extLst>
+                    <a:ext uri="{9D8B030D-6E8A-4147-A177-3AD203B41FA5}">
+                      <a16:colId xmlns:a16="http://schemas.microsoft.com/office/drawing/2014/main" val="20000"/>
+                    </a:ext>
+                  </a:extLst>
+                </a:gridCol>
+                <a:gridCol w="3776472">
+                  <a:extLst>
+                    <a:ext uri="{9D8B030D-6E8A-4147-A177-3AD203B41FA5}">
+                      <a16:colId xmlns:a16="http://schemas.microsoft.com/office/drawing/2014/main" val="20001"/>
+                    </a:ext>
+                  </a:extLst>
+                </a:gridCol>
               </a:tblGrid>
               <a:tr h="359271">
                 <a:tc>
@@ -5083,7 +4948,7 @@
                     <a:bodyPr/>
                     <a:lstStyle/>
                     <a:p>
-                      <a:pPr indent="0" marL="0">
+                      <a:pPr marL="0" indent="0">
                         <a:lnSpc>
                           <a:spcPts val="1820"/>
                         </a:lnSpc>
@@ -5107,7 +4972,7 @@
                       </a:endParaRPr>
                     </a:p>
                   </a:txBody>
-                  <a:tcPr marL="57785" marR="57785" marT="57785" marB="57785" anchor="t">
+                  <a:tcPr marL="57785" marR="57785" marT="57785" marB="57785">
                     <a:lnL w="12700" cap="flat" cmpd="sng" algn="ctr">
                       <a:solidFill>
                         <a:srgbClr val="CBCAC6"/>
@@ -5154,7 +5019,7 @@
                     <a:bodyPr/>
                     <a:lstStyle/>
                     <a:p>
-                      <a:pPr indent="0" marL="0">
+                      <a:pPr marL="0" indent="0">
                         <a:lnSpc>
                           <a:spcPts val="1820"/>
                         </a:lnSpc>
@@ -5178,7 +5043,7 @@
                       </a:endParaRPr>
                     </a:p>
                   </a:txBody>
-                  <a:tcPr marL="57785" marR="57785" marT="57785" marB="57785" anchor="t">
+                  <a:tcPr marL="57785" marR="57785" marT="57785" marB="57785">
                     <a:lnL w="12700" cap="flat" cmpd="sng" algn="ctr">
                       <a:solidFill>
                         <a:srgbClr val="1B1A18"/>
@@ -5220,6 +5085,11 @@
                     </a:solidFill>
                   </a:tcPr>
                 </a:tc>
+                <a:extLst>
+                  <a:ext uri="{0D108BD9-81ED-4DB2-BD59-A6C34878D82A}">
+                    <a16:rowId xmlns:a16="http://schemas.microsoft.com/office/drawing/2014/main" val="10000"/>
+                  </a:ext>
+                </a:extLst>
               </a:tr>
               <a:tr h="359271">
                 <a:tc>
@@ -5227,7 +5097,7 @@
                     <a:bodyPr/>
                     <a:lstStyle/>
                     <a:p>
-                      <a:pPr indent="0" marL="0">
+                      <a:pPr marL="0" indent="0">
                         <a:lnSpc>
                           <a:spcPts val="1820"/>
                         </a:lnSpc>
@@ -5251,7 +5121,7 @@
                       </a:endParaRPr>
                     </a:p>
                   </a:txBody>
-                  <a:tcPr marL="57785" marR="57785" marT="57785" marB="57785" anchor="t">
+                  <a:tcPr marL="57785" marR="57785" marT="57785" marB="57785">
                     <a:lnL w="12700" cap="flat" cmpd="sng" algn="ctr">
                       <a:solidFill>
                         <a:srgbClr val="CBCAC6"/>
@@ -5295,7 +5165,7 @@
                     <a:bodyPr/>
                     <a:lstStyle/>
                     <a:p>
-                      <a:pPr indent="0" marL="0">
+                      <a:pPr marL="0" indent="0">
                         <a:lnSpc>
                           <a:spcPts val="1820"/>
                         </a:lnSpc>
@@ -5319,7 +5189,7 @@
                       </a:endParaRPr>
                     </a:p>
                   </a:txBody>
-                  <a:tcPr marL="57785" marR="57785" marT="57785" marB="57785" anchor="t">
+                  <a:tcPr marL="57785" marR="57785" marT="57785" marB="57785">
                     <a:lnL w="12700" cap="flat" cmpd="sng" algn="ctr">
                       <a:solidFill>
                         <a:srgbClr val="CBCAC6"/>
@@ -5358,6 +5228,11 @@
                     </a:lnB>
                   </a:tcPr>
                 </a:tc>
+                <a:extLst>
+                  <a:ext uri="{0D108BD9-81ED-4DB2-BD59-A6C34878D82A}">
+                    <a16:rowId xmlns:a16="http://schemas.microsoft.com/office/drawing/2014/main" val="10001"/>
+                  </a:ext>
+                </a:extLst>
               </a:tr>
               <a:tr h="590352">
                 <a:tc>
@@ -5365,7 +5240,7 @@
                     <a:bodyPr/>
                     <a:lstStyle/>
                     <a:p>
-                      <a:pPr indent="0" marL="0">
+                      <a:pPr marL="0" indent="0">
                         <a:lnSpc>
                           <a:spcPts val="1820"/>
                         </a:lnSpc>
@@ -5389,7 +5264,7 @@
                       </a:endParaRPr>
                     </a:p>
                   </a:txBody>
-                  <a:tcPr marL="57785" marR="57785" marT="57785" marB="57785" anchor="t">
+                  <a:tcPr marL="57785" marR="57785" marT="57785" marB="57785">
                     <a:lnL w="12700" cap="flat" cmpd="sng" algn="ctr">
                       <a:solidFill>
                         <a:srgbClr val="CBCAC6"/>
@@ -5433,7 +5308,7 @@
                     <a:bodyPr/>
                     <a:lstStyle/>
                     <a:p>
-                      <a:pPr indent="0" marL="0">
+                      <a:pPr marL="0" indent="0">
                         <a:lnSpc>
                           <a:spcPts val="1820"/>
                         </a:lnSpc>
@@ -5457,7 +5332,7 @@
                       </a:endParaRPr>
                     </a:p>
                   </a:txBody>
-                  <a:tcPr marL="57785" marR="57785" marT="57785" marB="57785" anchor="t">
+                  <a:tcPr marL="57785" marR="57785" marT="57785" marB="57785">
                     <a:lnL w="12700" cap="flat" cmpd="sng" algn="ctr">
                       <a:solidFill>
                         <a:srgbClr val="CBCAC6"/>
@@ -5496,6 +5371,11 @@
                     </a:lnB>
                   </a:tcPr>
                 </a:tc>
+                <a:extLst>
+                  <a:ext uri="{0D108BD9-81ED-4DB2-BD59-A6C34878D82A}">
+                    <a16:rowId xmlns:a16="http://schemas.microsoft.com/office/drawing/2014/main" val="10002"/>
+                  </a:ext>
+                </a:extLst>
               </a:tr>
               <a:tr h="590352">
                 <a:tc>
@@ -5503,7 +5383,7 @@
                     <a:bodyPr/>
                     <a:lstStyle/>
                     <a:p>
-                      <a:pPr indent="0" marL="0">
+                      <a:pPr marL="0" indent="0">
                         <a:lnSpc>
                           <a:spcPts val="1820"/>
                         </a:lnSpc>
@@ -5527,7 +5407,7 @@
                       </a:endParaRPr>
                     </a:p>
                   </a:txBody>
-                  <a:tcPr marL="57785" marR="57785" marT="57785" marB="57785" anchor="t">
+                  <a:tcPr marL="57785" marR="57785" marT="57785" marB="57785">
                     <a:lnL w="12700" cap="flat" cmpd="sng" algn="ctr">
                       <a:solidFill>
                         <a:srgbClr val="CBCAC6"/>
@@ -5574,7 +5454,7 @@
                     <a:bodyPr/>
                     <a:lstStyle/>
                     <a:p>
-                      <a:pPr indent="0" marL="0">
+                      <a:pPr marL="0" indent="0">
                         <a:lnSpc>
                           <a:spcPts val="1820"/>
                         </a:lnSpc>
@@ -5598,7 +5478,7 @@
                       </a:endParaRPr>
                     </a:p>
                   </a:txBody>
-                  <a:tcPr marL="57785" marR="57785" marT="57785" marB="57785" anchor="t">
+                  <a:tcPr marL="57785" marR="57785" marT="57785" marB="57785">
                     <a:lnL w="12700" cap="flat" cmpd="sng" algn="ctr">
                       <a:solidFill>
                         <a:srgbClr val="B0BCB8"/>
@@ -5640,6 +5520,11 @@
                     </a:solidFill>
                   </a:tcPr>
                 </a:tc>
+                <a:extLst>
+                  <a:ext uri="{0D108BD9-81ED-4DB2-BD59-A6C34878D82A}">
+                    <a16:rowId xmlns:a16="http://schemas.microsoft.com/office/drawing/2014/main" val="10003"/>
+                  </a:ext>
+                </a:extLst>
               </a:tr>
               <a:tr h="359271">
                 <a:tc>
@@ -5647,7 +5532,7 @@
                     <a:bodyPr/>
                     <a:lstStyle/>
                     <a:p>
-                      <a:pPr indent="0" marL="0">
+                      <a:pPr marL="0" indent="0">
                         <a:lnSpc>
                           <a:spcPts val="1820"/>
                         </a:lnSpc>
@@ -5671,7 +5556,7 @@
                       </a:endParaRPr>
                     </a:p>
                   </a:txBody>
-                  <a:tcPr marL="57785" marR="57785" marT="57785" marB="57785" anchor="t">
+                  <a:tcPr marL="57785" marR="57785" marT="57785" marB="57785">
                     <a:lnL w="12700" cap="flat" cmpd="sng" algn="ctr">
                       <a:solidFill>
                         <a:srgbClr val="CBCAC6"/>
@@ -5715,7 +5600,7 @@
                     <a:bodyPr/>
                     <a:lstStyle/>
                     <a:p>
-                      <a:pPr indent="0" marL="0">
+                      <a:pPr marL="0" indent="0">
                         <a:lnSpc>
                           <a:spcPts val="1820"/>
                         </a:lnSpc>
@@ -5739,7 +5624,7 @@
                       </a:endParaRPr>
                     </a:p>
                   </a:txBody>
-                  <a:tcPr marL="57785" marR="57785" marT="57785" marB="57785" anchor="t">
+                  <a:tcPr marL="57785" marR="57785" marT="57785" marB="57785">
                     <a:lnL w="12700" cap="flat" cmpd="sng" algn="ctr">
                       <a:solidFill>
                         <a:srgbClr val="CBCAC6"/>
@@ -5778,6 +5663,11 @@
                     </a:lnB>
                   </a:tcPr>
                 </a:tc>
+                <a:extLst>
+                  <a:ext uri="{0D108BD9-81ED-4DB2-BD59-A6C34878D82A}">
+                    <a16:rowId xmlns:a16="http://schemas.microsoft.com/office/drawing/2014/main" val="10004"/>
+                  </a:ext>
+                </a:extLst>
               </a:tr>
             </a:tbl>
           </a:graphicData>
@@ -5806,7 +5696,7 @@
           </a:bodyPr>
           <a:lstStyle/>
           <a:p>
-            <a:pPr algn="l" indent="0" marL="0">
+            <a:pPr marL="0" indent="0" algn="l">
               <a:lnSpc>
                 <a:spcPts val="1680"/>
               </a:lnSpc>
@@ -5850,7 +5740,7 @@
           </a:bodyPr>
           <a:lstStyle/>
           <a:p>
-            <a:pPr algn="r" indent="0" marL="0">
+            <a:pPr marL="0" indent="0" algn="r">
               <a:lnSpc>
                 <a:spcPts val="1680"/>
               </a:lnSpc>
@@ -5887,6 +5777,7 @@
         <a:solidFill>
           <a:srgbClr val="F4F1EA"/>
         </a:solidFill>
+        <a:effectLst/>
       </p:bgPr>
     </p:bg>
     <p:spTree>
@@ -5926,14 +5817,14 @@
           </a:bodyPr>
           <a:lstStyle/>
           <a:p>
-            <a:pPr algn="l" indent="0" marL="0">
+            <a:pPr marL="0" indent="0" algn="l">
               <a:lnSpc>
                 <a:spcPts val="1680"/>
               </a:lnSpc>
               <a:buNone/>
             </a:pPr>
             <a:r>
-              <a:rPr lang="en-US" sz="1200" b="1" spc="150" kern="0" dirty="0">
+              <a:rPr lang="en-US" sz="1200" b="1" kern="0" spc="150" dirty="0">
                 <a:solidFill>
                   <a:srgbClr val="B45309"/>
                 </a:solidFill>
@@ -5970,14 +5861,14 @@
           </a:bodyPr>
           <a:lstStyle/>
           <a:p>
-            <a:pPr algn="l" indent="0" marL="0">
+            <a:pPr marL="0" indent="0" algn="l">
               <a:lnSpc>
                 <a:spcPts val="3520"/>
               </a:lnSpc>
               <a:buNone/>
             </a:pPr>
             <a:r>
-              <a:rPr lang="en-US" sz="3200" b="1" spc="-50" kern="0" dirty="0">
+              <a:rPr lang="en-US" sz="3200" b="1" kern="0" spc="-50" dirty="0">
                 <a:solidFill>
                   <a:srgbClr val="1D1C1A"/>
                 </a:solidFill>
@@ -6041,7 +5932,7 @@
           </a:bodyPr>
           <a:lstStyle/>
           <a:p>
-            <a:pPr algn="l" indent="0" marL="0">
+            <a:pPr marL="0" indent="0" algn="l">
               <a:lnSpc>
                 <a:spcPts val="2160"/>
               </a:lnSpc>
@@ -6085,7 +5976,7 @@
           </a:bodyPr>
           <a:lstStyle/>
           <a:p>
-            <a:pPr algn="l" indent="0" marL="0">
+            <a:pPr marL="0" indent="0" algn="l">
               <a:lnSpc>
                 <a:spcPts val="1960"/>
               </a:lnSpc>
@@ -6156,7 +6047,7 @@
           </a:bodyPr>
           <a:lstStyle/>
           <a:p>
-            <a:pPr algn="l" indent="0" marL="0">
+            <a:pPr marL="0" indent="0" algn="l">
               <a:lnSpc>
                 <a:spcPts val="2160"/>
               </a:lnSpc>
@@ -6200,7 +6091,7 @@
           </a:bodyPr>
           <a:lstStyle/>
           <a:p>
-            <a:pPr algn="l" indent="0" marL="0">
+            <a:pPr marL="0" indent="0" algn="l">
               <a:lnSpc>
                 <a:spcPts val="1960"/>
               </a:lnSpc>
@@ -6271,7 +6162,7 @@
           </a:bodyPr>
           <a:lstStyle/>
           <a:p>
-            <a:pPr algn="l" indent="0" marL="0">
+            <a:pPr marL="0" indent="0" algn="l">
               <a:lnSpc>
                 <a:spcPts val="2160"/>
               </a:lnSpc>
@@ -6315,7 +6206,7 @@
           </a:bodyPr>
           <a:lstStyle/>
           <a:p>
-            <a:pPr algn="l" indent="0" marL="0">
+            <a:pPr marL="0" indent="0" algn="l">
               <a:lnSpc>
                 <a:spcPts val="1960"/>
               </a:lnSpc>
@@ -6386,7 +6277,7 @@
           </a:bodyPr>
           <a:lstStyle/>
           <a:p>
-            <a:pPr algn="l" indent="0" marL="0">
+            <a:pPr marL="0" indent="0" algn="l">
               <a:lnSpc>
                 <a:spcPts val="2160"/>
               </a:lnSpc>
@@ -6430,7 +6321,7 @@
           </a:bodyPr>
           <a:lstStyle/>
           <a:p>
-            <a:pPr algn="l" indent="0" marL="0">
+            <a:pPr marL="0" indent="0" algn="l">
               <a:lnSpc>
                 <a:spcPts val="1960"/>
               </a:lnSpc>
@@ -6501,7 +6392,7 @@
           </a:bodyPr>
           <a:lstStyle/>
           <a:p>
-            <a:pPr algn="l" indent="0" marL="0">
+            <a:pPr marL="0" indent="0" algn="l">
               <a:lnSpc>
                 <a:spcPts val="2160"/>
               </a:lnSpc>
@@ -6545,7 +6436,7 @@
           </a:bodyPr>
           <a:lstStyle/>
           <a:p>
-            <a:pPr algn="l" indent="0" marL="0">
+            <a:pPr marL="0" indent="0" algn="l">
               <a:lnSpc>
                 <a:spcPts val="1960"/>
               </a:lnSpc>
@@ -6616,7 +6507,7 @@
           </a:bodyPr>
           <a:lstStyle/>
           <a:p>
-            <a:pPr algn="l" indent="0" marL="0">
+            <a:pPr marL="0" indent="0" algn="l">
               <a:lnSpc>
                 <a:spcPts val="2160"/>
               </a:lnSpc>
@@ -6660,7 +6551,7 @@
           </a:bodyPr>
           <a:lstStyle/>
           <a:p>
-            <a:pPr algn="l" indent="0" marL="0">
+            <a:pPr marL="0" indent="0" algn="l">
               <a:lnSpc>
                 <a:spcPts val="1960"/>
               </a:lnSpc>
@@ -6704,7 +6595,7 @@
           </a:bodyPr>
           <a:lstStyle/>
           <a:p>
-            <a:pPr algn="l" indent="0" marL="0">
+            <a:pPr marL="0" indent="0" algn="l">
               <a:lnSpc>
                 <a:spcPts val="1680"/>
               </a:lnSpc>
@@ -6748,7 +6639,7 @@
           </a:bodyPr>
           <a:lstStyle/>
           <a:p>
-            <a:pPr algn="r" indent="0" marL="0">
+            <a:pPr marL="0" indent="0" algn="r">
               <a:lnSpc>
                 <a:spcPts val="1680"/>
               </a:lnSpc>
@@ -6785,6 +6676,7 @@
         <a:solidFill>
           <a:srgbClr val="F4F1EA"/>
         </a:solidFill>
+        <a:effectLst/>
       </p:bgPr>
     </p:bg>
     <p:spTree>
@@ -6824,14 +6716,14 @@
           </a:bodyPr>
           <a:lstStyle/>
           <a:p>
-            <a:pPr algn="l" indent="0" marL="0">
+            <a:pPr marL="0" indent="0" algn="l">
               <a:lnSpc>
                 <a:spcPts val="1680"/>
               </a:lnSpc>
               <a:buNone/>
             </a:pPr>
             <a:r>
-              <a:rPr lang="en-US" sz="1200" b="1" spc="150" kern="0" dirty="0">
+              <a:rPr lang="en-US" sz="1200" b="1" kern="0" spc="150" dirty="0">
                 <a:solidFill>
                   <a:srgbClr val="0F766E"/>
                 </a:solidFill>
@@ -6868,14 +6760,14 @@
           </a:bodyPr>
           <a:lstStyle/>
           <a:p>
-            <a:pPr algn="l" indent="0" marL="0">
+            <a:pPr marL="0" indent="0" algn="l">
               <a:lnSpc>
                 <a:spcPts val="3520"/>
               </a:lnSpc>
               <a:buNone/>
             </a:pPr>
             <a:r>
-              <a:rPr lang="en-US" sz="3200" b="1" spc="-50" kern="0" dirty="0">
+              <a:rPr lang="en-US" sz="3200" b="1" kern="0" spc="-50" dirty="0">
                 <a:solidFill>
                   <a:srgbClr val="1D1C1A"/>
                 </a:solidFill>
@@ -6939,7 +6831,7 @@
           </a:bodyPr>
           <a:lstStyle/>
           <a:p>
-            <a:pPr algn="l" indent="0" marL="0">
+            <a:pPr marL="0" indent="0" algn="l">
               <a:lnSpc>
                 <a:spcPts val="1680"/>
               </a:lnSpc>
@@ -6962,15 +6854,15 @@
       </p:sp>
       <p:pic>
         <p:nvPicPr>
-          <p:cNvPr id="6" name="Image 0" descr="Chat">    </p:cNvPr>
+          <p:cNvPr id="6" name="Image 0" descr="Chat"/>
           <p:cNvPicPr>
             <a:picLocks noChangeAspect="1"/>
           </p:cNvPicPr>
           <p:nvPr/>
         </p:nvPicPr>
         <p:blipFill>
-          <a:blip r:embed="rId1"/>
-          <a:srcRect l="0" r="0" t="0" b="0"/>
+          <a:blip r:embed="rId3"/>
+          <a:srcRect/>
           <a:stretch/>
         </p:blipFill>
         <p:spPr>
@@ -7006,7 +6898,7 @@
           </a:bodyPr>
           <a:lstStyle/>
           <a:p>
-            <a:pPr algn="l" indent="0" marL="0">
+            <a:pPr marL="0" indent="0" algn="l">
               <a:lnSpc>
                 <a:spcPts val="1890"/>
               </a:lnSpc>
@@ -7029,15 +6921,15 @@
       </p:sp>
       <p:pic>
         <p:nvPicPr>
-          <p:cNvPr id="8" name="Image 1" descr="arrow-right">    </p:cNvPr>
+          <p:cNvPr id="8" name="Image 1" descr="arrow-right"/>
           <p:cNvPicPr>
             <a:picLocks noChangeAspect="1"/>
           </p:cNvPicPr>
           <p:nvPr/>
         </p:nvPicPr>
         <p:blipFill>
-          <a:blip r:embed="rId2"/>
-          <a:srcRect l="0" r="0" t="0" b="0"/>
+          <a:blip r:embed="rId4"/>
+          <a:srcRect/>
           <a:stretch/>
         </p:blipFill>
         <p:spPr>
@@ -7100,7 +6992,7 @@
           </a:bodyPr>
           <a:lstStyle/>
           <a:p>
-            <a:pPr algn="l" indent="0" marL="0">
+            <a:pPr marL="0" indent="0" algn="l">
               <a:lnSpc>
                 <a:spcPts val="1680"/>
               </a:lnSpc>
@@ -7123,15 +7015,15 @@
       </p:sp>
       <p:pic>
         <p:nvPicPr>
-          <p:cNvPr id="11" name="Image 2" descr="Lightning">    </p:cNvPr>
+          <p:cNvPr id="11" name="Image 2" descr="Lightning"/>
           <p:cNvPicPr>
             <a:picLocks noChangeAspect="1"/>
           </p:cNvPicPr>
           <p:nvPr/>
         </p:nvPicPr>
         <p:blipFill>
-          <a:blip r:embed="rId3"/>
-          <a:srcRect l="0" r="0" t="0" b="0"/>
+          <a:blip r:embed="rId5"/>
+          <a:srcRect/>
           <a:stretch/>
         </p:blipFill>
         <p:spPr>
@@ -7167,7 +7059,7 @@
           </a:bodyPr>
           <a:lstStyle/>
           <a:p>
-            <a:pPr algn="l" indent="0" marL="0">
+            <a:pPr marL="0" indent="0" algn="l">
               <a:lnSpc>
                 <a:spcPts val="1890"/>
               </a:lnSpc>
@@ -7190,7 +7082,7 @@
       </p:sp>
       <p:pic>
         <p:nvPicPr>
-          <p:cNvPr id="13" name="Image 3" descr="arrow-right">    </p:cNvPr>
+          <p:cNvPr id="13" name="Image 3" descr="arrow-right"/>
           <p:cNvPicPr>
             <a:picLocks noChangeAspect="1"/>
           </p:cNvPicPr>
@@ -7198,7 +7090,7 @@
         </p:nvPicPr>
         <p:blipFill>
           <a:blip r:embed="rId4"/>
-          <a:srcRect l="0" r="0" t="0" b="0"/>
+          <a:srcRect/>
           <a:stretch/>
         </p:blipFill>
         <p:spPr>
@@ -7261,7 +7153,7 @@
           </a:bodyPr>
           <a:lstStyle/>
           <a:p>
-            <a:pPr algn="l" indent="0" marL="0">
+            <a:pPr marL="0" indent="0" algn="l">
               <a:lnSpc>
                 <a:spcPts val="1680"/>
               </a:lnSpc>
@@ -7284,15 +7176,15 @@
       </p:sp>
       <p:pic>
         <p:nvPicPr>
-          <p:cNvPr id="16" name="Image 4" descr="CheckCircle">    </p:cNvPr>
+          <p:cNvPr id="16" name="Image 4" descr="CheckCircle"/>
           <p:cNvPicPr>
             <a:picLocks noChangeAspect="1"/>
           </p:cNvPicPr>
           <p:nvPr/>
         </p:nvPicPr>
         <p:blipFill>
-          <a:blip r:embed="rId5"/>
-          <a:srcRect l="0" r="0" t="0" b="0"/>
+          <a:blip r:embed="rId6"/>
+          <a:srcRect/>
           <a:stretch/>
         </p:blipFill>
         <p:spPr>
@@ -7328,7 +7220,7 @@
           </a:bodyPr>
           <a:lstStyle/>
           <a:p>
-            <a:pPr algn="l" indent="0" marL="0">
+            <a:pPr marL="0" indent="0" algn="l">
               <a:lnSpc>
                 <a:spcPts val="1890"/>
               </a:lnSpc>
@@ -7351,15 +7243,15 @@
       </p:sp>
       <p:pic>
         <p:nvPicPr>
-          <p:cNvPr id="18" name="Image 5" descr="arrow-right">    </p:cNvPr>
+          <p:cNvPr id="18" name="Image 5" descr="arrow-right"/>
           <p:cNvPicPr>
             <a:picLocks noChangeAspect="1"/>
           </p:cNvPicPr>
           <p:nvPr/>
         </p:nvPicPr>
         <p:blipFill>
-          <a:blip r:embed="rId6"/>
-          <a:srcRect l="0" r="0" t="0" b="0"/>
+          <a:blip r:embed="rId4"/>
+          <a:srcRect/>
           <a:stretch/>
         </p:blipFill>
         <p:spPr>
@@ -7422,7 +7314,7 @@
           </a:bodyPr>
           <a:lstStyle/>
           <a:p>
-            <a:pPr algn="l" indent="0" marL="0">
+            <a:pPr marL="0" indent="0" algn="l">
               <a:lnSpc>
                 <a:spcPts val="1680"/>
               </a:lnSpc>
@@ -7445,7 +7337,7 @@
       </p:sp>
       <p:pic>
         <p:nvPicPr>
-          <p:cNvPr id="21" name="Image 6" descr="Link">    </p:cNvPr>
+          <p:cNvPr id="21" name="Image 6" descr="Link"/>
           <p:cNvPicPr>
             <a:picLocks noChangeAspect="1"/>
           </p:cNvPicPr>
@@ -7453,7 +7345,7 @@
         </p:nvPicPr>
         <p:blipFill>
           <a:blip r:embed="rId7"/>
-          <a:srcRect l="0" r="0" t="0" b="0"/>
+          <a:srcRect/>
           <a:stretch/>
         </p:blipFill>
         <p:spPr>
@@ -7489,7 +7381,7 @@
           </a:bodyPr>
           <a:lstStyle/>
           <a:p>
-            <a:pPr algn="l" indent="0" marL="0">
+            <a:pPr marL="0" indent="0" algn="l">
               <a:lnSpc>
                 <a:spcPts val="1890"/>
               </a:lnSpc>
@@ -7512,15 +7404,15 @@
       </p:sp>
       <p:pic>
         <p:nvPicPr>
-          <p:cNvPr id="23" name="Image 7" descr="arrow-right">    </p:cNvPr>
+          <p:cNvPr id="23" name="Image 7" descr="arrow-right"/>
           <p:cNvPicPr>
             <a:picLocks noChangeAspect="1"/>
           </p:cNvPicPr>
           <p:nvPr/>
         </p:nvPicPr>
         <p:blipFill>
-          <a:blip r:embed="rId8"/>
-          <a:srcRect l="0" r="0" t="0" b="0"/>
+          <a:blip r:embed="rId4"/>
+          <a:srcRect/>
           <a:stretch/>
         </p:blipFill>
         <p:spPr>
@@ -7583,7 +7475,7 @@
           </a:bodyPr>
           <a:lstStyle/>
           <a:p>
-            <a:pPr algn="l" indent="0" marL="0">
+            <a:pPr marL="0" indent="0" algn="l">
               <a:lnSpc>
                 <a:spcPts val="1680"/>
               </a:lnSpc>
@@ -7606,15 +7498,15 @@
       </p:sp>
       <p:pic>
         <p:nvPicPr>
-          <p:cNvPr id="26" name="Image 8" descr="Verified">    </p:cNvPr>
+          <p:cNvPr id="26" name="Image 8" descr="Verified"/>
           <p:cNvPicPr>
             <a:picLocks noChangeAspect="1"/>
           </p:cNvPicPr>
           <p:nvPr/>
         </p:nvPicPr>
         <p:blipFill>
-          <a:blip r:embed="rId9"/>
-          <a:srcRect l="0" r="0" t="0" b="0"/>
+          <a:blip r:embed="rId8"/>
+          <a:srcRect/>
           <a:stretch/>
         </p:blipFill>
         <p:spPr>
@@ -7650,7 +7542,7 @@
           </a:bodyPr>
           <a:lstStyle/>
           <a:p>
-            <a:pPr algn="l" indent="0" marL="0">
+            <a:pPr marL="0" indent="0" algn="l">
               <a:lnSpc>
                 <a:spcPts val="1890"/>
               </a:lnSpc>
@@ -7694,7 +7586,7 @@
           </a:bodyPr>
           <a:lstStyle/>
           <a:p>
-            <a:pPr algn="l" indent="0" marL="0">
+            <a:pPr marL="0" indent="0" algn="l">
               <a:lnSpc>
                 <a:spcPts val="1960"/>
               </a:lnSpc>
@@ -7738,7 +7630,7 @@
           </a:bodyPr>
           <a:lstStyle/>
           <a:p>
-            <a:pPr algn="l" indent="0" marL="0">
+            <a:pPr marL="0" indent="0" algn="l">
               <a:lnSpc>
                 <a:spcPts val="1680"/>
               </a:lnSpc>
@@ -7782,7 +7674,7 @@
           </a:bodyPr>
           <a:lstStyle/>
           <a:p>
-            <a:pPr algn="r" indent="0" marL="0">
+            <a:pPr marL="0" indent="0" algn="r">
               <a:lnSpc>
                 <a:spcPts val="1680"/>
               </a:lnSpc>
@@ -7819,6 +7711,7 @@
         <a:solidFill>
           <a:srgbClr val="F4F1EA"/>
         </a:solidFill>
+        <a:effectLst/>
       </p:bgPr>
     </p:bg>
     <p:spTree>
@@ -7858,14 +7751,14 @@
           </a:bodyPr>
           <a:lstStyle/>
           <a:p>
-            <a:pPr algn="l" indent="0" marL="0">
+            <a:pPr marL="0" indent="0" algn="l">
               <a:lnSpc>
                 <a:spcPts val="1680"/>
               </a:lnSpc>
               <a:buNone/>
             </a:pPr>
             <a:r>
-              <a:rPr lang="en-US" sz="1200" b="1" spc="150" kern="0" dirty="0">
+              <a:rPr lang="en-US" sz="1200" b="1" kern="0" spc="150" dirty="0">
                 <a:solidFill>
                   <a:srgbClr val="0F766E"/>
                 </a:solidFill>
@@ -7902,14 +7795,14 @@
           </a:bodyPr>
           <a:lstStyle/>
           <a:p>
-            <a:pPr algn="l" indent="0" marL="0">
+            <a:pPr marL="0" indent="0" algn="l">
               <a:lnSpc>
                 <a:spcPts val="3520"/>
               </a:lnSpc>
               <a:buNone/>
             </a:pPr>
             <a:r>
-              <a:rPr lang="en-US" sz="3200" b="1" spc="-50" kern="0" dirty="0">
+              <a:rPr lang="en-US" sz="3200" b="1" kern="0" spc="-50" dirty="0">
                 <a:solidFill>
                   <a:srgbClr val="1D1C1A"/>
                 </a:solidFill>
@@ -7952,15 +7845,15 @@
       </p:sp>
       <p:pic>
         <p:nvPicPr>
-          <p:cNvPr id="5" name="Image 0" descr="Search">    </p:cNvPr>
+          <p:cNvPr id="5" name="Image 0" descr="Search"/>
           <p:cNvPicPr>
             <a:picLocks noChangeAspect="1"/>
           </p:cNvPicPr>
           <p:nvPr/>
         </p:nvPicPr>
         <p:blipFill>
-          <a:blip r:embed="rId1"/>
-          <a:srcRect l="0" r="0" t="0" b="0"/>
+          <a:blip r:embed="rId3"/>
+          <a:srcRect/>
           <a:stretch/>
         </p:blipFill>
         <p:spPr>
@@ -7996,7 +7889,7 @@
           </a:bodyPr>
           <a:lstStyle/>
           <a:p>
-            <a:pPr algn="l" indent="0" marL="0">
+            <a:pPr marL="0" indent="0" algn="l">
               <a:lnSpc>
                 <a:spcPts val="2160"/>
               </a:lnSpc>
@@ -8040,7 +7933,7 @@
           </a:bodyPr>
           <a:lstStyle/>
           <a:p>
-            <a:pPr algn="l" indent="0" marL="0">
+            <a:pPr marL="0" indent="0" algn="l">
               <a:lnSpc>
                 <a:spcPts val="1960"/>
               </a:lnSpc>
@@ -8090,15 +7983,15 @@
       </p:sp>
       <p:pic>
         <p:nvPicPr>
-          <p:cNvPr id="9" name="Image 1" descr="Database">    </p:cNvPr>
+          <p:cNvPr id="9" name="Image 1" descr="Database"/>
           <p:cNvPicPr>
             <a:picLocks noChangeAspect="1"/>
           </p:cNvPicPr>
           <p:nvPr/>
         </p:nvPicPr>
         <p:blipFill>
-          <a:blip r:embed="rId2"/>
-          <a:srcRect l="0" r="0" t="0" b="0"/>
+          <a:blip r:embed="rId4"/>
+          <a:srcRect/>
           <a:stretch/>
         </p:blipFill>
         <p:spPr>
@@ -8134,7 +8027,7 @@
           </a:bodyPr>
           <a:lstStyle/>
           <a:p>
-            <a:pPr algn="l" indent="0" marL="0">
+            <a:pPr marL="0" indent="0" algn="l">
               <a:lnSpc>
                 <a:spcPts val="2160"/>
               </a:lnSpc>
@@ -8178,7 +8071,7 @@
           </a:bodyPr>
           <a:lstStyle/>
           <a:p>
-            <a:pPr algn="l" indent="0" marL="0">
+            <a:pPr marL="0" indent="0" algn="l">
               <a:lnSpc>
                 <a:spcPts val="1960"/>
               </a:lnSpc>
@@ -8228,15 +8121,15 @@
       </p:sp>
       <p:pic>
         <p:nvPicPr>
-          <p:cNvPr id="13" name="Image 2" descr="Tool">    </p:cNvPr>
+          <p:cNvPr id="13" name="Image 2" descr="Tool"/>
           <p:cNvPicPr>
             <a:picLocks noChangeAspect="1"/>
           </p:cNvPicPr>
           <p:nvPr/>
         </p:nvPicPr>
         <p:blipFill>
-          <a:blip r:embed="rId3"/>
-          <a:srcRect l="0" r="0" t="0" b="0"/>
+          <a:blip r:embed="rId5"/>
+          <a:srcRect/>
           <a:stretch/>
         </p:blipFill>
         <p:spPr>
@@ -8272,7 +8165,7 @@
           </a:bodyPr>
           <a:lstStyle/>
           <a:p>
-            <a:pPr algn="l" indent="0" marL="0">
+            <a:pPr marL="0" indent="0" algn="l">
               <a:lnSpc>
                 <a:spcPts val="2160"/>
               </a:lnSpc>
@@ -8316,7 +8209,7 @@
           </a:bodyPr>
           <a:lstStyle/>
           <a:p>
-            <a:pPr algn="l" indent="0" marL="0">
+            <a:pPr marL="0" indent="0" algn="l">
               <a:lnSpc>
                 <a:spcPts val="1960"/>
               </a:lnSpc>
@@ -8366,15 +8259,15 @@
       </p:sp>
       <p:pic>
         <p:nvPicPr>
-          <p:cNvPr id="17" name="Image 3" descr="Home">    </p:cNvPr>
+          <p:cNvPr id="17" name="Image 3" descr="Home"/>
           <p:cNvPicPr>
             <a:picLocks noChangeAspect="1"/>
           </p:cNvPicPr>
           <p:nvPr/>
         </p:nvPicPr>
         <p:blipFill>
-          <a:blip r:embed="rId4"/>
-          <a:srcRect l="0" r="0" t="0" b="0"/>
+          <a:blip r:embed="rId6"/>
+          <a:srcRect/>
           <a:stretch/>
         </p:blipFill>
         <p:spPr>
@@ -8410,7 +8303,7 @@
           </a:bodyPr>
           <a:lstStyle/>
           <a:p>
-            <a:pPr algn="l" indent="0" marL="0">
+            <a:pPr marL="0" indent="0" algn="l">
               <a:lnSpc>
                 <a:spcPts val="2160"/>
               </a:lnSpc>
@@ -8454,7 +8347,7 @@
           </a:bodyPr>
           <a:lstStyle/>
           <a:p>
-            <a:pPr algn="l" indent="0" marL="0">
+            <a:pPr marL="0" indent="0" algn="l">
               <a:lnSpc>
                 <a:spcPts val="1960"/>
               </a:lnSpc>
@@ -8498,7 +8391,7 @@
           </a:bodyPr>
           <a:lstStyle/>
           <a:p>
-            <a:pPr algn="l" indent="0" marL="0">
+            <a:pPr marL="0" indent="0" algn="l">
               <a:lnSpc>
                 <a:spcPts val="1680"/>
               </a:lnSpc>
@@ -8542,7 +8435,7 @@
           </a:bodyPr>
           <a:lstStyle/>
           <a:p>
-            <a:pPr algn="r" indent="0" marL="0">
+            <a:pPr marL="0" indent="0" algn="r">
               <a:lnSpc>
                 <a:spcPts val="1680"/>
               </a:lnSpc>
@@ -8579,6 +8472,7 @@
         <a:solidFill>
           <a:srgbClr val="1D1C1A"/>
         </a:solidFill>
+        <a:effectLst/>
       </p:bgPr>
     </p:bg>
     <p:spTree>
@@ -8618,14 +8512,14 @@
           </a:bodyPr>
           <a:lstStyle/>
           <a:p>
-            <a:pPr algn="l" indent="0" marL="0">
+            <a:pPr marL="0" indent="0" algn="l">
               <a:lnSpc>
                 <a:spcPts val="1680"/>
               </a:lnSpc>
               <a:buNone/>
             </a:pPr>
             <a:r>
-              <a:rPr lang="en-US" sz="1200" b="1" spc="150" kern="0" dirty="0">
+              <a:rPr lang="en-US" sz="1200" b="1" kern="0" spc="150" dirty="0">
                 <a:solidFill>
                   <a:srgbClr val="8FC9BF"/>
                 </a:solidFill>
@@ -8662,14 +8556,14 @@
           </a:bodyPr>
           <a:lstStyle/>
           <a:p>
-            <a:pPr algn="l" indent="0" marL="0">
+            <a:pPr marL="0" indent="0" algn="l">
               <a:lnSpc>
                 <a:spcPts val="8000"/>
               </a:lnSpc>
               <a:buNone/>
             </a:pPr>
             <a:r>
-              <a:rPr lang="en-US" sz="8000" b="1" spc="-200" kern="0" dirty="0">
+              <a:rPr lang="en-US" sz="8000" b="1" kern="0" spc="-200" dirty="0">
                 <a:solidFill>
                   <a:srgbClr val="F4F1EA"/>
                 </a:solidFill>
@@ -8706,7 +8600,7 @@
           </a:bodyPr>
           <a:lstStyle/>
           <a:p>
-            <a:pPr algn="l" indent="0" marL="0">
+            <a:pPr marL="0" indent="0" algn="l">
               <a:lnSpc>
                 <a:spcPts val="2430"/>
               </a:lnSpc>
@@ -8750,7 +8644,7 @@
           </a:bodyPr>
           <a:lstStyle/>
           <a:p>
-            <a:pPr algn="l" indent="0" marL="0">
+            <a:pPr marL="0" indent="0" algn="l">
               <a:lnSpc>
                 <a:spcPts val="1680"/>
               </a:lnSpc>
@@ -8765,7 +8659,7 @@
                 <a:ea typeface="JetBrains Mono" pitchFamily="34" charset="-122"/>
                 <a:cs typeface="JetBrains Mono" pitchFamily="34" charset="-120"/>
               </a:rPr>
-              <a:t>[github.com/your-team/smart-troubleshooting-engine]</a:t>
+              <a:t>[github.com/Rayasam3/smart-troubleshooting-engine]</a:t>
             </a:r>
             <a:endParaRPr lang="en-US" sz="1200" dirty="0"/>
           </a:p>
@@ -8794,14 +8688,14 @@
           </a:bodyPr>
           <a:lstStyle/>
           <a:p>
-            <a:pPr algn="l" indent="0" marL="0">
+            <a:pPr marL="0" indent="0" algn="l">
               <a:lnSpc>
                 <a:spcPts val="1680"/>
               </a:lnSpc>
               <a:buNone/>
             </a:pPr>
             <a:r>
-              <a:rPr lang="en-US" sz="1200" dirty="0">
+              <a:rPr lang="en-US" sz="1200" dirty="0" err="1">
                 <a:solidFill>
                   <a:srgbClr val="BDB6A9"/>
                 </a:solidFill>
@@ -8809,7 +8703,18 @@
                 <a:ea typeface="JetBrains Mono" pitchFamily="34" charset="-122"/>
                 <a:cs typeface="JetBrains Mono" pitchFamily="34" charset="-120"/>
               </a:rPr>
-              <a:t>[Team name] · [Member A] · [Member B]</a:t>
+              <a:t>CodeSwitch</a:t>
+            </a:r>
+            <a:r>
+              <a:rPr lang="en-US" sz="1200" dirty="0">
+                <a:solidFill>
+                  <a:srgbClr val="BDB6A9"/>
+                </a:solidFill>
+                <a:latin typeface="JetBrains Mono" pitchFamily="34" charset="0"/>
+                <a:ea typeface="JetBrains Mono" pitchFamily="34" charset="-122"/>
+                <a:cs typeface="JetBrains Mono" pitchFamily="34" charset="-120"/>
+              </a:rPr>
+              <a:t> - Rayasam Amarnath · Neeraj Prasad</a:t>
             </a:r>
             <a:endParaRPr lang="en-US" sz="1200" dirty="0"/>
           </a:p>
@@ -8831,6 +8736,7 @@
         <a:solidFill>
           <a:srgbClr val="F4F1EA"/>
         </a:solidFill>
+        <a:effectLst/>
       </p:bgPr>
     </p:bg>
     <p:spTree>
@@ -8870,14 +8776,14 @@
           </a:bodyPr>
           <a:lstStyle/>
           <a:p>
-            <a:pPr algn="l" indent="0" marL="0">
+            <a:pPr marL="0" indent="0" algn="l">
               <a:lnSpc>
                 <a:spcPts val="1680"/>
               </a:lnSpc>
               <a:buNone/>
             </a:pPr>
             <a:r>
-              <a:rPr lang="en-US" sz="1200" b="1" spc="150" kern="0" dirty="0">
+              <a:rPr lang="en-US" sz="1200" b="1" kern="0" spc="150" dirty="0">
                 <a:solidFill>
                   <a:srgbClr val="0F766E"/>
                 </a:solidFill>
@@ -8914,14 +8820,14 @@
           </a:bodyPr>
           <a:lstStyle/>
           <a:p>
-            <a:pPr algn="l" indent="0" marL="0">
+            <a:pPr marL="0" indent="0" algn="l">
               <a:lnSpc>
                 <a:spcPts val="3520"/>
               </a:lnSpc>
               <a:buNone/>
             </a:pPr>
             <a:r>
-              <a:rPr lang="en-US" sz="3200" b="1" spc="-50" kern="0" dirty="0">
+              <a:rPr lang="en-US" sz="3200" b="1" kern="0" spc="-50" dirty="0">
                 <a:solidFill>
                   <a:srgbClr val="1D1C1A"/>
                 </a:solidFill>
@@ -8958,14 +8864,14 @@
           </a:bodyPr>
           <a:lstStyle/>
           <a:p>
-            <a:pPr algn="l" indent="0" marL="0">
+            <a:pPr marL="0" indent="0" algn="l">
               <a:lnSpc>
                 <a:spcPts val="8000"/>
               </a:lnSpc>
               <a:buNone/>
             </a:pPr>
             <a:r>
-              <a:rPr lang="en-US" sz="8000" b="1" spc="-200" kern="0" dirty="0">
+              <a:rPr lang="en-US" sz="8000" b="1" kern="0" spc="-200" dirty="0">
                 <a:solidFill>
                   <a:srgbClr val="0F766E"/>
                 </a:solidFill>
@@ -9002,7 +8908,7 @@
           </a:bodyPr>
           <a:lstStyle/>
           <a:p>
-            <a:pPr algn="l" indent="0" marL="0">
+            <a:pPr marL="0" indent="0" algn="l">
               <a:lnSpc>
                 <a:spcPts val="1960"/>
               </a:lnSpc>
@@ -9089,7 +8995,7 @@
           </a:bodyPr>
           <a:lstStyle/>
           <a:p>
-            <a:pPr algn="l" indent="0" marL="0">
+            <a:pPr marL="0" indent="0" algn="l">
               <a:lnSpc>
                 <a:spcPts val="1960"/>
               </a:lnSpc>
@@ -9156,7 +9062,7 @@
           </a:bodyPr>
           <a:lstStyle/>
           <a:p>
-            <a:pPr algn="l" indent="0" marL="0">
+            <a:pPr marL="0" indent="0" algn="l">
               <a:lnSpc>
                 <a:spcPts val="1960"/>
               </a:lnSpc>
@@ -9234,7 +9140,7 @@
           </a:bodyPr>
           <a:lstStyle/>
           <a:p>
-            <a:pPr algn="l" indent="0" marL="0">
+            <a:pPr marL="0" indent="0" algn="l">
               <a:lnSpc>
                 <a:spcPts val="1960"/>
               </a:lnSpc>
@@ -9289,7 +9195,7 @@
           </a:bodyPr>
           <a:lstStyle/>
           <a:p>
-            <a:pPr algn="l" indent="0" marL="0">
+            <a:pPr marL="0" indent="0" algn="l">
               <a:lnSpc>
                 <a:spcPts val="1960"/>
               </a:lnSpc>
@@ -9344,7 +9250,7 @@
           </a:bodyPr>
           <a:lstStyle/>
           <a:p>
-            <a:pPr algn="l" indent="0" marL="0">
+            <a:pPr marL="0" indent="0" algn="l">
               <a:lnSpc>
                 <a:spcPts val="1680"/>
               </a:lnSpc>
@@ -9388,7 +9294,7 @@
           </a:bodyPr>
           <a:lstStyle/>
           <a:p>
-            <a:pPr algn="r" indent="0" marL="0">
+            <a:pPr marL="0" indent="0" algn="r">
               <a:lnSpc>
                 <a:spcPts val="1680"/>
               </a:lnSpc>
@@ -9425,6 +9331,7 @@
         <a:solidFill>
           <a:srgbClr val="F4F1EA"/>
         </a:solidFill>
+        <a:effectLst/>
       </p:bgPr>
     </p:bg>
     <p:spTree>
@@ -9464,14 +9371,14 @@
           </a:bodyPr>
           <a:lstStyle/>
           <a:p>
-            <a:pPr algn="l" indent="0" marL="0">
+            <a:pPr marL="0" indent="0" algn="l">
               <a:lnSpc>
                 <a:spcPts val="1622"/>
               </a:lnSpc>
               <a:buNone/>
             </a:pPr>
             <a:r>
-              <a:rPr lang="en-US" sz="1159" b="1" spc="150" kern="0" dirty="0">
+              <a:rPr lang="en-US" sz="1159" b="1" kern="0" spc="150" dirty="0">
                 <a:solidFill>
                   <a:srgbClr val="0F766E"/>
                 </a:solidFill>
@@ -9508,14 +9415,14 @@
           </a:bodyPr>
           <a:lstStyle/>
           <a:p>
-            <a:pPr algn="l" indent="0" marL="0">
+            <a:pPr marL="0" indent="0" algn="l">
               <a:lnSpc>
                 <a:spcPts val="3322"/>
               </a:lnSpc>
               <a:buNone/>
             </a:pPr>
             <a:r>
-              <a:rPr lang="en-US" sz="3020" b="1" spc="-50" kern="0" dirty="0">
+              <a:rPr lang="en-US" sz="3020" b="1" kern="0" spc="-50" dirty="0">
                 <a:solidFill>
                   <a:srgbClr val="1D1C1A"/>
                 </a:solidFill>
@@ -9574,14 +9481,14 @@
           </a:bodyPr>
           <a:lstStyle/>
           <a:p>
-            <a:pPr algn="l" indent="0" marL="0">
+            <a:pPr marL="0" indent="0" algn="l">
               <a:lnSpc>
                 <a:spcPts val="1680"/>
               </a:lnSpc>
               <a:buNone/>
             </a:pPr>
             <a:r>
-              <a:rPr lang="en-US" sz="1200" spc="100" kern="0" dirty="0">
+              <a:rPr lang="en-US" sz="1200" kern="0" spc="100" dirty="0">
                 <a:solidFill>
                   <a:srgbClr val="8FC9BF"/>
                 </a:solidFill>
@@ -9618,7 +9525,7 @@
           </a:bodyPr>
           <a:lstStyle/>
           <a:p>
-            <a:pPr algn="l" indent="0" marL="0">
+            <a:pPr marL="0" indent="0" algn="l">
               <a:lnSpc>
                 <a:spcPts val="1960"/>
               </a:lnSpc>
@@ -9641,15 +9548,15 @@
       </p:sp>
       <p:pic>
         <p:nvPicPr>
-          <p:cNvPr id="7" name="Image 0" descr="arrow-right">    </p:cNvPr>
+          <p:cNvPr id="7" name="Image 0" descr="arrow-right"/>
           <p:cNvPicPr>
             <a:picLocks noChangeAspect="1"/>
           </p:cNvPicPr>
           <p:nvPr/>
         </p:nvPicPr>
         <p:blipFill>
-          <a:blip r:embed="rId1"/>
-          <a:srcRect l="0" r="0" t="0" b="0"/>
+          <a:blip r:embed="rId3"/>
+          <a:srcRect/>
           <a:stretch/>
         </p:blipFill>
         <p:spPr>
@@ -9712,14 +9619,14 @@
           </a:bodyPr>
           <a:lstStyle/>
           <a:p>
-            <a:pPr algn="l" indent="0" marL="0">
+            <a:pPr marL="0" indent="0" algn="l">
               <a:lnSpc>
                 <a:spcPts val="1680"/>
               </a:lnSpc>
               <a:buNone/>
             </a:pPr>
             <a:r>
-              <a:rPr lang="en-US" sz="1200" spc="100" kern="0" dirty="0">
+              <a:rPr lang="en-US" sz="1200" kern="0" spc="100" dirty="0">
                 <a:solidFill>
                   <a:srgbClr val="0F766E"/>
                 </a:solidFill>
@@ -9779,7 +9686,7 @@
           </a:bodyPr>
           <a:lstStyle/>
           <a:p>
-            <a:pPr algn="l" indent="0" marL="0">
+            <a:pPr marL="0" indent="0" algn="l">
               <a:lnSpc>
                 <a:spcPts val="1960"/>
               </a:lnSpc>
@@ -9856,14 +9763,14 @@
           </a:bodyPr>
           <a:lstStyle/>
           <a:p>
-            <a:pPr algn="l" indent="0" marL="0">
+            <a:pPr marL="0" indent="0" algn="l">
               <a:lnSpc>
                 <a:spcPts val="1680"/>
               </a:lnSpc>
               <a:buNone/>
             </a:pPr>
             <a:r>
-              <a:rPr lang="en-US" sz="1200" b="1" spc="100" kern="0" dirty="0">
+              <a:rPr lang="en-US" sz="1200" b="1" kern="0" spc="100" dirty="0">
                 <a:solidFill>
                   <a:srgbClr val="F4F1EA"/>
                 </a:solidFill>
@@ -9923,7 +9830,7 @@
           </a:bodyPr>
           <a:lstStyle/>
           <a:p>
-            <a:pPr algn="l" indent="0" marL="0">
+            <a:pPr marL="0" indent="0" algn="l">
               <a:lnSpc>
                 <a:spcPts val="1960"/>
               </a:lnSpc>
@@ -10000,14 +9907,14 @@
           </a:bodyPr>
           <a:lstStyle/>
           <a:p>
-            <a:pPr algn="l" indent="0" marL="0">
+            <a:pPr marL="0" indent="0" algn="l">
               <a:lnSpc>
                 <a:spcPts val="1680"/>
               </a:lnSpc>
               <a:buNone/>
             </a:pPr>
             <a:r>
-              <a:rPr lang="en-US" sz="1200" b="1" spc="100" kern="0" dirty="0">
+              <a:rPr lang="en-US" sz="1200" b="1" kern="0" spc="100" dirty="0">
                 <a:solidFill>
                   <a:srgbClr val="F4F1EA"/>
                 </a:solidFill>
@@ -10067,7 +9974,7 @@
           </a:bodyPr>
           <a:lstStyle/>
           <a:p>
-            <a:pPr algn="l" indent="0" marL="0">
+            <a:pPr marL="0" indent="0" algn="l">
               <a:lnSpc>
                 <a:spcPts val="1960"/>
               </a:lnSpc>
@@ -10144,14 +10051,14 @@
           </a:bodyPr>
           <a:lstStyle/>
           <a:p>
-            <a:pPr algn="l" indent="0" marL="0">
+            <a:pPr marL="0" indent="0" algn="l">
               <a:lnSpc>
                 <a:spcPts val="1680"/>
               </a:lnSpc>
               <a:buNone/>
             </a:pPr>
             <a:r>
-              <a:rPr lang="en-US" sz="1200" b="1" spc="100" kern="0" dirty="0">
+              <a:rPr lang="en-US" sz="1200" b="1" kern="0" spc="100" dirty="0">
                 <a:solidFill>
                   <a:srgbClr val="F4F1EA"/>
                 </a:solidFill>
@@ -10211,7 +10118,7 @@
           </a:bodyPr>
           <a:lstStyle/>
           <a:p>
-            <a:pPr algn="l" indent="0" marL="0">
+            <a:pPr marL="0" indent="0" algn="l">
               <a:lnSpc>
                 <a:spcPts val="1960"/>
               </a:lnSpc>
@@ -10288,14 +10195,14 @@
           </a:bodyPr>
           <a:lstStyle/>
           <a:p>
-            <a:pPr algn="l" indent="0" marL="0">
+            <a:pPr marL="0" indent="0" algn="l">
               <a:lnSpc>
                 <a:spcPts val="1680"/>
               </a:lnSpc>
               <a:buNone/>
             </a:pPr>
             <a:r>
-              <a:rPr lang="en-US" sz="1200" b="1" spc="100" kern="0" dirty="0">
+              <a:rPr lang="en-US" sz="1200" b="1" kern="0" spc="100" dirty="0">
                 <a:solidFill>
                   <a:srgbClr val="F4F1EA"/>
                 </a:solidFill>
@@ -10355,7 +10262,7 @@
           </a:bodyPr>
           <a:lstStyle/>
           <a:p>
-            <a:pPr algn="l" indent="0" marL="0">
+            <a:pPr marL="0" indent="0" algn="l">
               <a:lnSpc>
                 <a:spcPts val="1960"/>
               </a:lnSpc>
@@ -10432,14 +10339,14 @@
           </a:bodyPr>
           <a:lstStyle/>
           <a:p>
-            <a:pPr algn="l" indent="0" marL="0">
+            <a:pPr marL="0" indent="0" algn="l">
               <a:lnSpc>
                 <a:spcPts val="1680"/>
               </a:lnSpc>
               <a:buNone/>
             </a:pPr>
             <a:r>
-              <a:rPr lang="en-US" sz="1200" b="1" spc="100" kern="0" dirty="0">
+              <a:rPr lang="en-US" sz="1200" b="1" kern="0" spc="100" dirty="0">
                 <a:solidFill>
                   <a:srgbClr val="F4F1EA"/>
                 </a:solidFill>
@@ -10499,7 +10406,7 @@
           </a:bodyPr>
           <a:lstStyle/>
           <a:p>
-            <a:pPr algn="l" indent="0" marL="0">
+            <a:pPr marL="0" indent="0" algn="l">
               <a:lnSpc>
                 <a:spcPts val="1960"/>
               </a:lnSpc>
@@ -10576,14 +10483,14 @@
           </a:bodyPr>
           <a:lstStyle/>
           <a:p>
-            <a:pPr algn="l" indent="0" marL="0">
+            <a:pPr marL="0" indent="0" algn="l">
               <a:lnSpc>
                 <a:spcPts val="1680"/>
               </a:lnSpc>
               <a:buNone/>
             </a:pPr>
             <a:r>
-              <a:rPr lang="en-US" sz="1200" b="1" spc="100" kern="0" dirty="0">
+              <a:rPr lang="en-US" sz="1200" b="1" kern="0" spc="100" dirty="0">
                 <a:solidFill>
                   <a:srgbClr val="F4F1EA"/>
                 </a:solidFill>
@@ -10643,7 +10550,7 @@
           </a:bodyPr>
           <a:lstStyle/>
           <a:p>
-            <a:pPr algn="l" indent="0" marL="0">
+            <a:pPr marL="0" indent="0" algn="l">
               <a:lnSpc>
                 <a:spcPts val="1960"/>
               </a:lnSpc>
@@ -10720,14 +10627,14 @@
           </a:bodyPr>
           <a:lstStyle/>
           <a:p>
-            <a:pPr algn="l" indent="0" marL="0">
+            <a:pPr marL="0" indent="0" algn="l">
               <a:lnSpc>
                 <a:spcPts val="1680"/>
               </a:lnSpc>
               <a:buNone/>
             </a:pPr>
             <a:r>
-              <a:rPr lang="en-US" sz="1200" b="1" spc="100" kern="0" dirty="0">
+              <a:rPr lang="en-US" sz="1200" b="1" kern="0" spc="100" dirty="0">
                 <a:solidFill>
                   <a:srgbClr val="F4F1EA"/>
                 </a:solidFill>
@@ -10787,7 +10694,7 @@
           </a:bodyPr>
           <a:lstStyle/>
           <a:p>
-            <a:pPr algn="l" indent="0" marL="0">
+            <a:pPr marL="0" indent="0" algn="l">
               <a:lnSpc>
                 <a:spcPts val="1960"/>
               </a:lnSpc>
@@ -10864,14 +10771,14 @@
           </a:bodyPr>
           <a:lstStyle/>
           <a:p>
-            <a:pPr algn="l" indent="0" marL="0">
+            <a:pPr marL="0" indent="0" algn="l">
               <a:lnSpc>
                 <a:spcPts val="1680"/>
               </a:lnSpc>
               <a:buNone/>
             </a:pPr>
             <a:r>
-              <a:rPr lang="en-US" sz="1200" b="1" spc="100" kern="0" dirty="0">
+              <a:rPr lang="en-US" sz="1200" b="1" kern="0" spc="100" dirty="0">
                 <a:solidFill>
                   <a:srgbClr val="F4F1EA"/>
                 </a:solidFill>
@@ -10908,7 +10815,7 @@
           </a:bodyPr>
           <a:lstStyle/>
           <a:p>
-            <a:pPr algn="l" indent="0" marL="0">
+            <a:pPr marL="0" indent="0" algn="l">
               <a:lnSpc>
                 <a:spcPts val="1680"/>
               </a:lnSpc>
@@ -10952,7 +10859,7 @@
           </a:bodyPr>
           <a:lstStyle/>
           <a:p>
-            <a:pPr algn="r" indent="0" marL="0">
+            <a:pPr marL="0" indent="0" algn="r">
               <a:lnSpc>
                 <a:spcPts val="1680"/>
               </a:lnSpc>
@@ -10989,6 +10896,7 @@
         <a:solidFill>
           <a:srgbClr val="F4F1EA"/>
         </a:solidFill>
+        <a:effectLst/>
       </p:bgPr>
     </p:bg>
     <p:spTree>
@@ -11028,14 +10936,14 @@
           </a:bodyPr>
           <a:lstStyle/>
           <a:p>
-            <a:pPr algn="l" indent="0" marL="0">
+            <a:pPr marL="0" indent="0" algn="l">
               <a:lnSpc>
                 <a:spcPts val="1680"/>
               </a:lnSpc>
               <a:buNone/>
             </a:pPr>
             <a:r>
-              <a:rPr lang="en-US" sz="1200" b="1" spc="150" kern="0" dirty="0">
+              <a:rPr lang="en-US" sz="1200" b="1" kern="0" spc="150" dirty="0">
                 <a:solidFill>
                   <a:srgbClr val="0F766E"/>
                 </a:solidFill>
@@ -11072,14 +10980,14 @@
           </a:bodyPr>
           <a:lstStyle/>
           <a:p>
-            <a:pPr algn="l" indent="0" marL="0">
+            <a:pPr marL="0" indent="0" algn="l">
               <a:lnSpc>
                 <a:spcPts val="3520"/>
               </a:lnSpc>
               <a:buNone/>
             </a:pPr>
             <a:r>
-              <a:rPr lang="en-US" sz="3200" b="1" spc="-50" kern="0" dirty="0">
+              <a:rPr lang="en-US" sz="3200" b="1" kern="0" spc="-50" dirty="0">
                 <a:solidFill>
                   <a:srgbClr val="1D1C1A"/>
                 </a:solidFill>
@@ -11143,7 +11051,7 @@
           </a:bodyPr>
           <a:lstStyle/>
           <a:p>
-            <a:pPr algn="l" indent="0" marL="0">
+            <a:pPr marL="0" indent="0" algn="l">
               <a:lnSpc>
                 <a:spcPts val="1680"/>
               </a:lnSpc>
@@ -11187,7 +11095,7 @@
           </a:bodyPr>
           <a:lstStyle/>
           <a:p>
-            <a:pPr algn="l" indent="0" marL="0">
+            <a:pPr marL="0" indent="0" algn="l">
               <a:lnSpc>
                 <a:spcPts val="1680"/>
               </a:lnSpc>
@@ -11210,15 +11118,15 @@
       </p:sp>
       <p:pic>
         <p:nvPicPr>
-          <p:cNvPr id="7" name="Image 0" descr="arrow-right">    </p:cNvPr>
+          <p:cNvPr id="7" name="Image 0" descr="arrow-right"/>
           <p:cNvPicPr>
             <a:picLocks noChangeAspect="1"/>
           </p:cNvPicPr>
           <p:nvPr/>
         </p:nvPicPr>
         <p:blipFill>
-          <a:blip r:embed="rId1"/>
-          <a:srcRect l="0" r="0" t="0" b="0"/>
+          <a:blip r:embed="rId3"/>
+          <a:srcRect/>
           <a:stretch/>
         </p:blipFill>
         <p:spPr>
@@ -11281,7 +11189,7 @@
           </a:bodyPr>
           <a:lstStyle/>
           <a:p>
-            <a:pPr algn="l" indent="0" marL="0">
+            <a:pPr marL="0" indent="0" algn="l">
               <a:lnSpc>
                 <a:spcPts val="1680"/>
               </a:lnSpc>
@@ -11325,7 +11233,7 @@
           </a:bodyPr>
           <a:lstStyle/>
           <a:p>
-            <a:pPr algn="l" indent="0" marL="0">
+            <a:pPr marL="0" indent="0" algn="l">
               <a:lnSpc>
                 <a:spcPts val="1680"/>
               </a:lnSpc>
@@ -11348,15 +11256,15 @@
       </p:sp>
       <p:pic>
         <p:nvPicPr>
-          <p:cNvPr id="11" name="Image 1" descr="arrow-right">    </p:cNvPr>
+          <p:cNvPr id="11" name="Image 1" descr="arrow-right"/>
           <p:cNvPicPr>
             <a:picLocks noChangeAspect="1"/>
           </p:cNvPicPr>
           <p:nvPr/>
         </p:nvPicPr>
         <p:blipFill>
-          <a:blip r:embed="rId2"/>
-          <a:srcRect l="0" r="0" t="0" b="0"/>
+          <a:blip r:embed="rId3"/>
+          <a:srcRect/>
           <a:stretch/>
         </p:blipFill>
         <p:spPr>
@@ -11419,7 +11327,7 @@
           </a:bodyPr>
           <a:lstStyle/>
           <a:p>
-            <a:pPr algn="l" indent="0" marL="0">
+            <a:pPr marL="0" indent="0" algn="l">
               <a:lnSpc>
                 <a:spcPts val="1680"/>
               </a:lnSpc>
@@ -11463,7 +11371,7 @@
           </a:bodyPr>
           <a:lstStyle/>
           <a:p>
-            <a:pPr algn="l" indent="0" marL="0">
+            <a:pPr marL="0" indent="0" algn="l">
               <a:lnSpc>
                 <a:spcPts val="1680"/>
               </a:lnSpc>
@@ -11507,7 +11415,7 @@
           </a:bodyPr>
           <a:lstStyle/>
           <a:p>
-            <a:pPr algn="l" indent="0" marL="0">
+            <a:pPr marL="0" indent="0" algn="l">
               <a:lnSpc>
                 <a:spcPts val="1680"/>
               </a:lnSpc>
@@ -11578,7 +11486,7 @@
           </a:bodyPr>
           <a:lstStyle/>
           <a:p>
-            <a:pPr algn="l" indent="0" marL="0">
+            <a:pPr marL="0" indent="0" algn="l">
               <a:lnSpc>
                 <a:spcPts val="1680"/>
               </a:lnSpc>
@@ -11622,7 +11530,7 @@
           </a:bodyPr>
           <a:lstStyle/>
           <a:p>
-            <a:pPr algn="l" indent="0" marL="0">
+            <a:pPr marL="0" indent="0" algn="l">
               <a:lnSpc>
                 <a:spcPts val="1680"/>
               </a:lnSpc>
@@ -11645,7 +11553,7 @@
       </p:sp>
       <p:pic>
         <p:nvPicPr>
-          <p:cNvPr id="19" name="Image 2" descr="arrow-right">    </p:cNvPr>
+          <p:cNvPr id="19" name="Image 2" descr="arrow-right"/>
           <p:cNvPicPr>
             <a:picLocks noChangeAspect="1"/>
           </p:cNvPicPr>
@@ -11653,7 +11561,7 @@
         </p:nvPicPr>
         <p:blipFill>
           <a:blip r:embed="rId3"/>
-          <a:srcRect l="0" r="0" t="0" b="0"/>
+          <a:srcRect/>
           <a:stretch/>
         </p:blipFill>
         <p:spPr>
@@ -11716,7 +11624,7 @@
           </a:bodyPr>
           <a:lstStyle/>
           <a:p>
-            <a:pPr algn="l" indent="0" marL="0">
+            <a:pPr marL="0" indent="0" algn="l">
               <a:lnSpc>
                 <a:spcPts val="1680"/>
               </a:lnSpc>
@@ -11760,7 +11668,7 @@
           </a:bodyPr>
           <a:lstStyle/>
           <a:p>
-            <a:pPr algn="l" indent="0" marL="0">
+            <a:pPr marL="0" indent="0" algn="l">
               <a:lnSpc>
                 <a:spcPts val="1680"/>
               </a:lnSpc>
@@ -11783,15 +11691,15 @@
       </p:sp>
       <p:pic>
         <p:nvPicPr>
-          <p:cNvPr id="23" name="Image 3" descr="arrow-right">    </p:cNvPr>
+          <p:cNvPr id="23" name="Image 3" descr="arrow-right"/>
           <p:cNvPicPr>
             <a:picLocks noChangeAspect="1"/>
           </p:cNvPicPr>
           <p:nvPr/>
         </p:nvPicPr>
         <p:blipFill>
-          <a:blip r:embed="rId4"/>
-          <a:srcRect l="0" r="0" t="0" b="0"/>
+          <a:blip r:embed="rId3"/>
+          <a:srcRect/>
           <a:stretch/>
         </p:blipFill>
         <p:spPr>
@@ -11854,7 +11762,7 @@
           </a:bodyPr>
           <a:lstStyle/>
           <a:p>
-            <a:pPr algn="l" indent="0" marL="0">
+            <a:pPr marL="0" indent="0" algn="l">
               <a:lnSpc>
                 <a:spcPts val="1680"/>
               </a:lnSpc>
@@ -11898,7 +11806,7 @@
           </a:bodyPr>
           <a:lstStyle/>
           <a:p>
-            <a:pPr algn="l" indent="0" marL="0">
+            <a:pPr marL="0" indent="0" algn="l">
               <a:lnSpc>
                 <a:spcPts val="1680"/>
               </a:lnSpc>
@@ -11921,15 +11829,15 @@
       </p:sp>
       <p:pic>
         <p:nvPicPr>
-          <p:cNvPr id="27" name="Image 4" descr="arrow-right">    </p:cNvPr>
+          <p:cNvPr id="27" name="Image 4" descr="arrow-right"/>
           <p:cNvPicPr>
             <a:picLocks noChangeAspect="1"/>
           </p:cNvPicPr>
           <p:nvPr/>
         </p:nvPicPr>
         <p:blipFill>
-          <a:blip r:embed="rId5"/>
-          <a:srcRect l="0" r="0" t="0" b="0"/>
+          <a:blip r:embed="rId3"/>
+          <a:srcRect/>
           <a:stretch/>
         </p:blipFill>
         <p:spPr>
@@ -11992,7 +11900,7 @@
           </a:bodyPr>
           <a:lstStyle/>
           <a:p>
-            <a:pPr algn="l" indent="0" marL="0">
+            <a:pPr marL="0" indent="0" algn="l">
               <a:lnSpc>
                 <a:spcPts val="1680"/>
               </a:lnSpc>
@@ -12036,7 +11944,7 @@
           </a:bodyPr>
           <a:lstStyle/>
           <a:p>
-            <a:pPr algn="l" indent="0" marL="0">
+            <a:pPr marL="0" indent="0" algn="l">
               <a:lnSpc>
                 <a:spcPts val="1680"/>
               </a:lnSpc>
@@ -12059,15 +11967,15 @@
       </p:sp>
       <p:pic>
         <p:nvPicPr>
-          <p:cNvPr id="31" name="Image 5" descr="arrow-right">    </p:cNvPr>
+          <p:cNvPr id="31" name="Image 5" descr="arrow-right"/>
           <p:cNvPicPr>
             <a:picLocks noChangeAspect="1"/>
           </p:cNvPicPr>
           <p:nvPr/>
         </p:nvPicPr>
         <p:blipFill>
-          <a:blip r:embed="rId6"/>
-          <a:srcRect l="0" r="0" t="0" b="0"/>
+          <a:blip r:embed="rId3"/>
+          <a:srcRect/>
           <a:stretch/>
         </p:blipFill>
         <p:spPr>
@@ -12130,7 +12038,7 @@
           </a:bodyPr>
           <a:lstStyle/>
           <a:p>
-            <a:pPr algn="l" indent="0" marL="0">
+            <a:pPr marL="0" indent="0" algn="l">
               <a:lnSpc>
                 <a:spcPts val="1680"/>
               </a:lnSpc>
@@ -12174,7 +12082,7 @@
           </a:bodyPr>
           <a:lstStyle/>
           <a:p>
-            <a:pPr algn="l" indent="0" marL="0">
+            <a:pPr marL="0" indent="0" algn="l">
               <a:lnSpc>
                 <a:spcPts val="1680"/>
               </a:lnSpc>
@@ -12218,7 +12126,7 @@
           </a:bodyPr>
           <a:lstStyle/>
           <a:p>
-            <a:pPr algn="l" indent="0" marL="0">
+            <a:pPr marL="0" indent="0" algn="l">
               <a:lnSpc>
                 <a:spcPts val="1680"/>
               </a:lnSpc>
@@ -12262,7 +12170,7 @@
           </a:bodyPr>
           <a:lstStyle/>
           <a:p>
-            <a:pPr algn="l" indent="0" marL="0">
+            <a:pPr marL="0" indent="0" algn="l">
               <a:lnSpc>
                 <a:spcPts val="1680"/>
               </a:lnSpc>
@@ -12306,7 +12214,7 @@
           </a:bodyPr>
           <a:lstStyle/>
           <a:p>
-            <a:pPr algn="r" indent="0" marL="0">
+            <a:pPr marL="0" indent="0" algn="r">
               <a:lnSpc>
                 <a:spcPts val="1680"/>
               </a:lnSpc>
@@ -12343,6 +12251,7 @@
         <a:solidFill>
           <a:srgbClr val="0F766E"/>
         </a:solidFill>
+        <a:effectLst/>
       </p:bgPr>
     </p:bg>
     <p:spTree>
@@ -12382,14 +12291,14 @@
           </a:bodyPr>
           <a:lstStyle/>
           <a:p>
-            <a:pPr algn="l" indent="0" marL="0">
+            <a:pPr marL="0" indent="0" algn="l">
               <a:lnSpc>
                 <a:spcPts val="1680"/>
               </a:lnSpc>
               <a:buNone/>
             </a:pPr>
             <a:r>
-              <a:rPr lang="en-US" sz="1200" b="1" spc="150" kern="0" dirty="0">
+              <a:rPr lang="en-US" sz="1200" b="1" kern="0" spc="150" dirty="0">
                 <a:solidFill>
                   <a:srgbClr val="BFE3DC"/>
                 </a:solidFill>
@@ -12426,14 +12335,14 @@
           </a:bodyPr>
           <a:lstStyle/>
           <a:p>
-            <a:pPr algn="l" indent="0" marL="0">
+            <a:pPr marL="0" indent="0" algn="l">
               <a:lnSpc>
                 <a:spcPts val="8000"/>
               </a:lnSpc>
               <a:buNone/>
             </a:pPr>
             <a:r>
-              <a:rPr lang="en-US" sz="8000" b="1" spc="-200" kern="0" dirty="0">
+              <a:rPr lang="en-US" sz="8000" b="1" kern="0" spc="-200" dirty="0">
                 <a:solidFill>
                   <a:srgbClr val="F4F1EA"/>
                 </a:solidFill>
@@ -12446,14 +12355,14 @@
             <a:endParaRPr lang="en-US" sz="8000" dirty="0"/>
           </a:p>
           <a:p>
-            <a:pPr algn="l" indent="0" marL="0">
+            <a:pPr marL="0" indent="0" algn="l">
               <a:lnSpc>
                 <a:spcPts val="8000"/>
               </a:lnSpc>
               <a:buNone/>
             </a:pPr>
             <a:r>
-              <a:rPr lang="en-US" sz="8000" b="1" spc="-200" kern="0" dirty="0">
+              <a:rPr lang="en-US" sz="8000" b="1" kern="0" spc="-200" dirty="0">
                 <a:solidFill>
                   <a:srgbClr val="F4F1EA"/>
                 </a:solidFill>
@@ -12490,7 +12399,7 @@
           </a:bodyPr>
           <a:lstStyle/>
           <a:p>
-            <a:pPr algn="l" indent="0" marL="0">
+            <a:pPr marL="0" indent="0" algn="l">
               <a:lnSpc>
                 <a:spcPts val="2430"/>
               </a:lnSpc>
@@ -12527,6 +12436,7 @@
         <a:solidFill>
           <a:srgbClr val="F4F1EA"/>
         </a:solidFill>
+        <a:effectLst/>
       </p:bgPr>
     </p:bg>
     <p:spTree>
@@ -12566,14 +12476,14 @@
           </a:bodyPr>
           <a:lstStyle/>
           <a:p>
-            <a:pPr algn="l" indent="0" marL="0">
+            <a:pPr marL="0" indent="0" algn="l">
               <a:lnSpc>
                 <a:spcPts val="1680"/>
               </a:lnSpc>
               <a:buNone/>
             </a:pPr>
             <a:r>
-              <a:rPr lang="en-US" sz="1200" b="1" spc="150" kern="0" dirty="0">
+              <a:rPr lang="en-US" sz="1200" b="1" kern="0" spc="150" dirty="0">
                 <a:solidFill>
                   <a:srgbClr val="0F766E"/>
                 </a:solidFill>
@@ -12610,14 +12520,14 @@
           </a:bodyPr>
           <a:lstStyle/>
           <a:p>
-            <a:pPr algn="l" indent="0" marL="0">
+            <a:pPr marL="0" indent="0" algn="l">
               <a:lnSpc>
                 <a:spcPts val="3520"/>
               </a:lnSpc>
               <a:buNone/>
             </a:pPr>
             <a:r>
-              <a:rPr lang="en-US" sz="3200" b="1" spc="-50" kern="0" dirty="0">
+              <a:rPr lang="en-US" sz="3200" b="1" kern="0" spc="-50" dirty="0">
                 <a:solidFill>
                   <a:srgbClr val="1D1C1A"/>
                 </a:solidFill>
@@ -12660,15 +12570,15 @@
       </p:sp>
       <p:pic>
         <p:nvPicPr>
-          <p:cNvPr id="5" name="Image 0" descr="Check">    </p:cNvPr>
+          <p:cNvPr id="5" name="Image 0" descr="Check"/>
           <p:cNvPicPr>
             <a:picLocks noChangeAspect="1"/>
           </p:cNvPicPr>
           <p:nvPr/>
         </p:nvPicPr>
         <p:blipFill>
-          <a:blip r:embed="rId1"/>
-          <a:srcRect l="0" r="0" t="0" b="0"/>
+          <a:blip r:embed="rId3"/>
+          <a:srcRect/>
           <a:stretch/>
         </p:blipFill>
         <p:spPr>
@@ -12704,7 +12614,7 @@
           </a:bodyPr>
           <a:lstStyle/>
           <a:p>
-            <a:pPr algn="l" indent="0" marL="0">
+            <a:pPr marL="0" indent="0" algn="l">
               <a:lnSpc>
                 <a:spcPts val="2160"/>
               </a:lnSpc>
@@ -12748,7 +12658,7 @@
           </a:bodyPr>
           <a:lstStyle/>
           <a:p>
-            <a:pPr algn="l" indent="0" marL="0">
+            <a:pPr marL="0" indent="0" algn="l">
               <a:lnSpc>
                 <a:spcPts val="1960"/>
               </a:lnSpc>
@@ -12798,15 +12708,15 @@
       </p:sp>
       <p:pic>
         <p:nvPicPr>
-          <p:cNvPr id="9" name="Image 1" descr="Lock">    </p:cNvPr>
+          <p:cNvPr id="9" name="Image 1" descr="Lock"/>
           <p:cNvPicPr>
             <a:picLocks noChangeAspect="1"/>
           </p:cNvPicPr>
           <p:nvPr/>
         </p:nvPicPr>
         <p:blipFill>
-          <a:blip r:embed="rId2"/>
-          <a:srcRect l="0" r="0" t="0" b="0"/>
+          <a:blip r:embed="rId4"/>
+          <a:srcRect/>
           <a:stretch/>
         </p:blipFill>
         <p:spPr>
@@ -12842,7 +12752,7 @@
           </a:bodyPr>
           <a:lstStyle/>
           <a:p>
-            <a:pPr algn="l" indent="0" marL="0">
+            <a:pPr marL="0" indent="0" algn="l">
               <a:lnSpc>
                 <a:spcPts val="2160"/>
               </a:lnSpc>
@@ -12886,7 +12796,7 @@
           </a:bodyPr>
           <a:lstStyle/>
           <a:p>
-            <a:pPr algn="l" indent="0" marL="0">
+            <a:pPr marL="0" indent="0" algn="l">
               <a:lnSpc>
                 <a:spcPts val="1960"/>
               </a:lnSpc>
@@ -12936,15 +12846,15 @@
       </p:sp>
       <p:pic>
         <p:nvPicPr>
-          <p:cNvPr id="13" name="Image 2" descr="Search">    </p:cNvPr>
+          <p:cNvPr id="13" name="Image 2" descr="Search"/>
           <p:cNvPicPr>
             <a:picLocks noChangeAspect="1"/>
           </p:cNvPicPr>
           <p:nvPr/>
         </p:nvPicPr>
         <p:blipFill>
-          <a:blip r:embed="rId3"/>
-          <a:srcRect l="0" r="0" t="0" b="0"/>
+          <a:blip r:embed="rId5"/>
+          <a:srcRect/>
           <a:stretch/>
         </p:blipFill>
         <p:spPr>
@@ -12980,7 +12890,7 @@
           </a:bodyPr>
           <a:lstStyle/>
           <a:p>
-            <a:pPr algn="l" indent="0" marL="0">
+            <a:pPr marL="0" indent="0" algn="l">
               <a:lnSpc>
                 <a:spcPts val="2160"/>
               </a:lnSpc>
@@ -13024,7 +12934,7 @@
           </a:bodyPr>
           <a:lstStyle/>
           <a:p>
-            <a:pPr algn="l" indent="0" marL="0">
+            <a:pPr marL="0" indent="0" algn="l">
               <a:lnSpc>
                 <a:spcPts val="1960"/>
               </a:lnSpc>
@@ -13074,15 +12984,15 @@
       </p:sp>
       <p:pic>
         <p:nvPicPr>
-          <p:cNvPr id="17" name="Image 3" descr="Verified">    </p:cNvPr>
+          <p:cNvPr id="17" name="Image 3" descr="Verified"/>
           <p:cNvPicPr>
             <a:picLocks noChangeAspect="1"/>
           </p:cNvPicPr>
           <p:nvPr/>
         </p:nvPicPr>
         <p:blipFill>
-          <a:blip r:embed="rId4"/>
-          <a:srcRect l="0" r="0" t="0" b="0"/>
+          <a:blip r:embed="rId6"/>
+          <a:srcRect/>
           <a:stretch/>
         </p:blipFill>
         <p:spPr>
@@ -13118,7 +13028,7 @@
           </a:bodyPr>
           <a:lstStyle/>
           <a:p>
-            <a:pPr algn="l" indent="0" marL="0">
+            <a:pPr marL="0" indent="0" algn="l">
               <a:lnSpc>
                 <a:spcPts val="2160"/>
               </a:lnSpc>
@@ -13162,7 +13072,7 @@
           </a:bodyPr>
           <a:lstStyle/>
           <a:p>
-            <a:pPr algn="l" indent="0" marL="0">
+            <a:pPr marL="0" indent="0" algn="l">
               <a:lnSpc>
                 <a:spcPts val="1960"/>
               </a:lnSpc>
@@ -13206,7 +13116,7 @@
           </a:bodyPr>
           <a:lstStyle/>
           <a:p>
-            <a:pPr algn="l" indent="0" marL="0">
+            <a:pPr marL="0" indent="0" algn="l">
               <a:lnSpc>
                 <a:spcPts val="1680"/>
               </a:lnSpc>
@@ -13250,7 +13160,7 @@
           </a:bodyPr>
           <a:lstStyle/>
           <a:p>
-            <a:pPr algn="r" indent="0" marL="0">
+            <a:pPr marL="0" indent="0" algn="r">
               <a:lnSpc>
                 <a:spcPts val="1680"/>
               </a:lnSpc>
@@ -13287,6 +13197,7 @@
         <a:solidFill>
           <a:srgbClr val="F4F1EA"/>
         </a:solidFill>
+        <a:effectLst/>
       </p:bgPr>
     </p:bg>
     <p:spTree>
@@ -13326,14 +13237,14 @@
           </a:bodyPr>
           <a:lstStyle/>
           <a:p>
-            <a:pPr algn="l" indent="0" marL="0">
+            <a:pPr marL="0" indent="0" algn="l">
               <a:lnSpc>
                 <a:spcPts val="1680"/>
               </a:lnSpc>
               <a:buNone/>
             </a:pPr>
             <a:r>
-              <a:rPr lang="en-US" sz="1200" b="1" spc="150" kern="0" dirty="0">
+              <a:rPr lang="en-US" sz="1200" b="1" kern="0" spc="150" dirty="0">
                 <a:solidFill>
                   <a:srgbClr val="0F766E"/>
                 </a:solidFill>
@@ -13370,14 +13281,14 @@
           </a:bodyPr>
           <a:lstStyle/>
           <a:p>
-            <a:pPr algn="l" indent="0" marL="0">
+            <a:pPr marL="0" indent="0" algn="l">
               <a:lnSpc>
                 <a:spcPts val="3520"/>
               </a:lnSpc>
               <a:buNone/>
             </a:pPr>
             <a:r>
-              <a:rPr lang="en-US" sz="3200" b="1" spc="-50" kern="0" dirty="0">
+              <a:rPr lang="en-US" sz="3200" b="1" kern="0" spc="-50" dirty="0">
                 <a:solidFill>
                   <a:srgbClr val="1D1C1A"/>
                 </a:solidFill>
@@ -13414,7 +13325,7 @@
           </a:bodyPr>
           <a:lstStyle/>
           <a:p>
-            <a:pPr algn="l" indent="0" marL="0">
+            <a:pPr marL="0" indent="0" algn="l">
               <a:lnSpc>
                 <a:spcPts val="1960"/>
               </a:lnSpc>
@@ -13471,16 +13382,34 @@
         </p:nvGraphicFramePr>
         <p:xfrm>
           <a:off x="825500" y="2694682"/>
-          <a:ext cx="10553700" cy="2514898"/>
+          <a:ext cx="10553700" cy="2514897"/>
         </p:xfrm>
         <a:graphic>
           <a:graphicData uri="http://schemas.openxmlformats.org/drawingml/2006/table">
             <a:tbl>
               <a:tblPr/>
               <a:tblGrid>
-                <a:gridCol w="3377184"/>
-                <a:gridCol w="4432554"/>
-                <a:gridCol w="2743962"/>
+                <a:gridCol w="3377184">
+                  <a:extLst>
+                    <a:ext uri="{9D8B030D-6E8A-4147-A177-3AD203B41FA5}">
+                      <a16:colId xmlns:a16="http://schemas.microsoft.com/office/drawing/2014/main" val="20000"/>
+                    </a:ext>
+                  </a:extLst>
+                </a:gridCol>
+                <a:gridCol w="4432554">
+                  <a:extLst>
+                    <a:ext uri="{9D8B030D-6E8A-4147-A177-3AD203B41FA5}">
+                      <a16:colId xmlns:a16="http://schemas.microsoft.com/office/drawing/2014/main" val="20001"/>
+                    </a:ext>
+                  </a:extLst>
+                </a:gridCol>
+                <a:gridCol w="2743962">
+                  <a:extLst>
+                    <a:ext uri="{9D8B030D-6E8A-4147-A177-3AD203B41FA5}">
+                      <a16:colId xmlns:a16="http://schemas.microsoft.com/office/drawing/2014/main" val="20002"/>
+                    </a:ext>
+                  </a:extLst>
+                </a:gridCol>
               </a:tblGrid>
               <a:tr h="359271">
                 <a:tc>
@@ -13488,7 +13417,7 @@
                     <a:bodyPr/>
                     <a:lstStyle/>
                     <a:p>
-                      <a:pPr indent="0" marL="0">
+                      <a:pPr marL="0" indent="0">
                         <a:lnSpc>
                           <a:spcPts val="1820"/>
                         </a:lnSpc>
@@ -13512,7 +13441,7 @@
                       </a:endParaRPr>
                     </a:p>
                   </a:txBody>
-                  <a:tcPr marL="57785" marR="57785" marT="57785" marB="57785" anchor="t">
+                  <a:tcPr marL="57785" marR="57785" marT="57785" marB="57785">
                     <a:lnL w="12700" cap="flat" cmpd="sng" algn="ctr">
                       <a:solidFill>
                         <a:srgbClr val="CBCAC6"/>
@@ -13559,7 +13488,7 @@
                     <a:bodyPr/>
                     <a:lstStyle/>
                     <a:p>
-                      <a:pPr indent="0" marL="0">
+                      <a:pPr marL="0" indent="0">
                         <a:lnSpc>
                           <a:spcPts val="1820"/>
                         </a:lnSpc>
@@ -13583,7 +13512,7 @@
                       </a:endParaRPr>
                     </a:p>
                   </a:txBody>
-                  <a:tcPr marL="57785" marR="57785" marT="57785" marB="57785" anchor="t">
+                  <a:tcPr marL="57785" marR="57785" marT="57785" marB="57785">
                     <a:lnL w="12700" cap="flat" cmpd="sng" algn="ctr">
                       <a:solidFill>
                         <a:srgbClr val="1B1A18"/>
@@ -13630,7 +13559,7 @@
                     <a:bodyPr/>
                     <a:lstStyle/>
                     <a:p>
-                      <a:pPr indent="0" marL="0">
+                      <a:pPr marL="0" indent="0">
                         <a:lnSpc>
                           <a:spcPts val="1820"/>
                         </a:lnSpc>
@@ -13654,7 +13583,7 @@
                       </a:endParaRPr>
                     </a:p>
                   </a:txBody>
-                  <a:tcPr marL="57785" marR="57785" marT="57785" marB="57785" anchor="t">
+                  <a:tcPr marL="57785" marR="57785" marT="57785" marB="57785">
                     <a:lnL w="12700" cap="flat" cmpd="sng" algn="ctr">
                       <a:solidFill>
                         <a:srgbClr val="1B1A18"/>
@@ -13696,6 +13625,11 @@
                     </a:solidFill>
                   </a:tcPr>
                 </a:tc>
+                <a:extLst>
+                  <a:ext uri="{0D108BD9-81ED-4DB2-BD59-A6C34878D82A}">
+                    <a16:rowId xmlns:a16="http://schemas.microsoft.com/office/drawing/2014/main" val="10000"/>
+                  </a:ext>
+                </a:extLst>
               </a:tr>
               <a:tr h="359271">
                 <a:tc>
@@ -13703,7 +13637,7 @@
                     <a:bodyPr/>
                     <a:lstStyle/>
                     <a:p>
-                      <a:pPr indent="0" marL="0">
+                      <a:pPr marL="0" indent="0">
                         <a:lnSpc>
                           <a:spcPts val="1820"/>
                         </a:lnSpc>
@@ -13727,7 +13661,7 @@
                       </a:endParaRPr>
                     </a:p>
                   </a:txBody>
-                  <a:tcPr marL="57785" marR="57785" marT="57785" marB="57785" anchor="t">
+                  <a:tcPr marL="57785" marR="57785" marT="57785" marB="57785">
                     <a:lnL w="12700" cap="flat" cmpd="sng" algn="ctr">
                       <a:solidFill>
                         <a:srgbClr val="CBCAC6"/>
@@ -13771,7 +13705,7 @@
                     <a:bodyPr/>
                     <a:lstStyle/>
                     <a:p>
-                      <a:pPr indent="0" marL="0">
+                      <a:pPr marL="0" indent="0">
                         <a:lnSpc>
                           <a:spcPts val="1820"/>
                         </a:lnSpc>
@@ -13795,7 +13729,7 @@
                       </a:endParaRPr>
                     </a:p>
                   </a:txBody>
-                  <a:tcPr marL="57785" marR="57785" marT="57785" marB="57785" anchor="t">
+                  <a:tcPr marL="57785" marR="57785" marT="57785" marB="57785">
                     <a:lnL w="12700" cap="flat" cmpd="sng" algn="ctr">
                       <a:solidFill>
                         <a:srgbClr val="CBCAC6"/>
@@ -13839,7 +13773,7 @@
                     <a:bodyPr/>
                     <a:lstStyle/>
                     <a:p>
-                      <a:pPr indent="0" marL="0">
+                      <a:pPr marL="0" indent="0">
                         <a:lnSpc>
                           <a:spcPts val="1820"/>
                         </a:lnSpc>
@@ -13863,7 +13797,7 @@
                       </a:endParaRPr>
                     </a:p>
                   </a:txBody>
-                  <a:tcPr marL="57785" marR="57785" marT="57785" marB="57785" anchor="t">
+                  <a:tcPr marL="57785" marR="57785" marT="57785" marB="57785">
                     <a:lnL w="12700" cap="flat" cmpd="sng" algn="ctr">
                       <a:solidFill>
                         <a:srgbClr val="CBCAC6"/>
@@ -13902,6 +13836,11 @@
                     </a:lnB>
                   </a:tcPr>
                 </a:tc>
+                <a:extLst>
+                  <a:ext uri="{0D108BD9-81ED-4DB2-BD59-A6C34878D82A}">
+                    <a16:rowId xmlns:a16="http://schemas.microsoft.com/office/drawing/2014/main" val="10001"/>
+                  </a:ext>
+                </a:extLst>
               </a:tr>
               <a:tr h="359271">
                 <a:tc>
@@ -13909,7 +13848,7 @@
                     <a:bodyPr/>
                     <a:lstStyle/>
                     <a:p>
-                      <a:pPr indent="0" marL="0">
+                      <a:pPr marL="0" indent="0">
                         <a:lnSpc>
                           <a:spcPts val="1820"/>
                         </a:lnSpc>
@@ -13933,7 +13872,7 @@
                       </a:endParaRPr>
                     </a:p>
                   </a:txBody>
-                  <a:tcPr marL="57785" marR="57785" marT="57785" marB="57785" anchor="t">
+                  <a:tcPr marL="57785" marR="57785" marT="57785" marB="57785">
                     <a:lnL w="12700" cap="flat" cmpd="sng" algn="ctr">
                       <a:solidFill>
                         <a:srgbClr val="CBCAC6"/>
@@ -13977,7 +13916,7 @@
                     <a:bodyPr/>
                     <a:lstStyle/>
                     <a:p>
-                      <a:pPr indent="0" marL="0">
+                      <a:pPr marL="0" indent="0">
                         <a:lnSpc>
                           <a:spcPts val="1820"/>
                         </a:lnSpc>
@@ -14001,7 +13940,7 @@
                       </a:endParaRPr>
                     </a:p>
                   </a:txBody>
-                  <a:tcPr marL="57785" marR="57785" marT="57785" marB="57785" anchor="t">
+                  <a:tcPr marL="57785" marR="57785" marT="57785" marB="57785">
                     <a:lnL w="12700" cap="flat" cmpd="sng" algn="ctr">
                       <a:solidFill>
                         <a:srgbClr val="CBCAC6"/>
@@ -14045,7 +13984,7 @@
                     <a:bodyPr/>
                     <a:lstStyle/>
                     <a:p>
-                      <a:pPr indent="0" marL="0">
+                      <a:pPr marL="0" indent="0">
                         <a:lnSpc>
                           <a:spcPts val="1820"/>
                         </a:lnSpc>
@@ -14069,7 +14008,7 @@
                       </a:endParaRPr>
                     </a:p>
                   </a:txBody>
-                  <a:tcPr marL="57785" marR="57785" marT="57785" marB="57785" anchor="t">
+                  <a:tcPr marL="57785" marR="57785" marT="57785" marB="57785">
                     <a:lnL w="12700" cap="flat" cmpd="sng" algn="ctr">
                       <a:solidFill>
                         <a:srgbClr val="CBCAC6"/>
@@ -14108,6 +14047,11 @@
                     </a:lnB>
                   </a:tcPr>
                 </a:tc>
+                <a:extLst>
+                  <a:ext uri="{0D108BD9-81ED-4DB2-BD59-A6C34878D82A}">
+                    <a16:rowId xmlns:a16="http://schemas.microsoft.com/office/drawing/2014/main" val="10002"/>
+                  </a:ext>
+                </a:extLst>
               </a:tr>
               <a:tr h="359271">
                 <a:tc>
@@ -14115,7 +14059,7 @@
                     <a:bodyPr/>
                     <a:lstStyle/>
                     <a:p>
-                      <a:pPr indent="0" marL="0">
+                      <a:pPr marL="0" indent="0">
                         <a:lnSpc>
                           <a:spcPts val="1820"/>
                         </a:lnSpc>
@@ -14139,7 +14083,7 @@
                       </a:endParaRPr>
                     </a:p>
                   </a:txBody>
-                  <a:tcPr marL="57785" marR="57785" marT="57785" marB="57785" anchor="t">
+                  <a:tcPr marL="57785" marR="57785" marT="57785" marB="57785">
                     <a:lnL w="12700" cap="flat" cmpd="sng" algn="ctr">
                       <a:solidFill>
                         <a:srgbClr val="CBCAC6"/>
@@ -14183,7 +14127,7 @@
                     <a:bodyPr/>
                     <a:lstStyle/>
                     <a:p>
-                      <a:pPr indent="0" marL="0">
+                      <a:pPr marL="0" indent="0">
                         <a:lnSpc>
                           <a:spcPts val="1820"/>
                         </a:lnSpc>
@@ -14207,7 +14151,7 @@
                       </a:endParaRPr>
                     </a:p>
                   </a:txBody>
-                  <a:tcPr marL="57785" marR="57785" marT="57785" marB="57785" anchor="t">
+                  <a:tcPr marL="57785" marR="57785" marT="57785" marB="57785">
                     <a:lnL w="12700" cap="flat" cmpd="sng" algn="ctr">
                       <a:solidFill>
                         <a:srgbClr val="CBCAC6"/>
@@ -14251,7 +14195,7 @@
                     <a:bodyPr/>
                     <a:lstStyle/>
                     <a:p>
-                      <a:pPr indent="0" marL="0">
+                      <a:pPr marL="0" indent="0">
                         <a:lnSpc>
                           <a:spcPts val="1820"/>
                         </a:lnSpc>
@@ -14275,7 +14219,7 @@
                       </a:endParaRPr>
                     </a:p>
                   </a:txBody>
-                  <a:tcPr marL="57785" marR="57785" marT="57785" marB="57785" anchor="t">
+                  <a:tcPr marL="57785" marR="57785" marT="57785" marB="57785">
                     <a:lnL w="12700" cap="flat" cmpd="sng" algn="ctr">
                       <a:solidFill>
                         <a:srgbClr val="CBCAC6"/>
@@ -14314,6 +14258,11 @@
                     </a:lnB>
                   </a:tcPr>
                 </a:tc>
+                <a:extLst>
+                  <a:ext uri="{0D108BD9-81ED-4DB2-BD59-A6C34878D82A}">
+                    <a16:rowId xmlns:a16="http://schemas.microsoft.com/office/drawing/2014/main" val="10003"/>
+                  </a:ext>
+                </a:extLst>
               </a:tr>
               <a:tr h="359271">
                 <a:tc>
@@ -14321,7 +14270,7 @@
                     <a:bodyPr/>
                     <a:lstStyle/>
                     <a:p>
-                      <a:pPr indent="0" marL="0">
+                      <a:pPr marL="0" indent="0">
                         <a:lnSpc>
                           <a:spcPts val="1820"/>
                         </a:lnSpc>
@@ -14345,7 +14294,7 @@
                       </a:endParaRPr>
                     </a:p>
                   </a:txBody>
-                  <a:tcPr marL="57785" marR="57785" marT="57785" marB="57785" anchor="t">
+                  <a:tcPr marL="57785" marR="57785" marT="57785" marB="57785">
                     <a:lnL w="12700" cap="flat" cmpd="sng" algn="ctr">
                       <a:solidFill>
                         <a:srgbClr val="CBCAC6"/>
@@ -14389,7 +14338,7 @@
                     <a:bodyPr/>
                     <a:lstStyle/>
                     <a:p>
-                      <a:pPr indent="0" marL="0">
+                      <a:pPr marL="0" indent="0">
                         <a:lnSpc>
                           <a:spcPts val="1820"/>
                         </a:lnSpc>
@@ -14413,7 +14362,7 @@
                       </a:endParaRPr>
                     </a:p>
                   </a:txBody>
-                  <a:tcPr marL="57785" marR="57785" marT="57785" marB="57785" anchor="t">
+                  <a:tcPr marL="57785" marR="57785" marT="57785" marB="57785">
                     <a:lnL w="12700" cap="flat" cmpd="sng" algn="ctr">
                       <a:solidFill>
                         <a:srgbClr val="CBCAC6"/>
@@ -14457,7 +14406,7 @@
                     <a:bodyPr/>
                     <a:lstStyle/>
                     <a:p>
-                      <a:pPr indent="0" marL="0">
+                      <a:pPr marL="0" indent="0">
                         <a:lnSpc>
                           <a:spcPts val="1820"/>
                         </a:lnSpc>
@@ -14481,7 +14430,7 @@
                       </a:endParaRPr>
                     </a:p>
                   </a:txBody>
-                  <a:tcPr marL="57785" marR="57785" marT="57785" marB="57785" anchor="t">
+                  <a:tcPr marL="57785" marR="57785" marT="57785" marB="57785">
                     <a:lnL w="12700" cap="flat" cmpd="sng" algn="ctr">
                       <a:solidFill>
                         <a:srgbClr val="CBCAC6"/>
@@ -14520,6 +14469,11 @@
                     </a:lnB>
                   </a:tcPr>
                 </a:tc>
+                <a:extLst>
+                  <a:ext uri="{0D108BD9-81ED-4DB2-BD59-A6C34878D82A}">
+                    <a16:rowId xmlns:a16="http://schemas.microsoft.com/office/drawing/2014/main" val="10004"/>
+                  </a:ext>
+                </a:extLst>
               </a:tr>
               <a:tr h="359271">
                 <a:tc>
@@ -14527,7 +14481,7 @@
                     <a:bodyPr/>
                     <a:lstStyle/>
                     <a:p>
-                      <a:pPr indent="0" marL="0">
+                      <a:pPr marL="0" indent="0">
                         <a:lnSpc>
                           <a:spcPts val="1820"/>
                         </a:lnSpc>
@@ -14551,7 +14505,7 @@
                       </a:endParaRPr>
                     </a:p>
                   </a:txBody>
-                  <a:tcPr marL="57785" marR="57785" marT="57785" marB="57785" anchor="t">
+                  <a:tcPr marL="57785" marR="57785" marT="57785" marB="57785">
                     <a:lnL w="12700" cap="flat" cmpd="sng" algn="ctr">
                       <a:solidFill>
                         <a:srgbClr val="CBCAC6"/>
@@ -14595,7 +14549,7 @@
                     <a:bodyPr/>
                     <a:lstStyle/>
                     <a:p>
-                      <a:pPr indent="0" marL="0">
+                      <a:pPr marL="0" indent="0">
                         <a:lnSpc>
                           <a:spcPts val="1820"/>
                         </a:lnSpc>
@@ -14619,7 +14573,7 @@
                       </a:endParaRPr>
                     </a:p>
                   </a:txBody>
-                  <a:tcPr marL="57785" marR="57785" marT="57785" marB="57785" anchor="t">
+                  <a:tcPr marL="57785" marR="57785" marT="57785" marB="57785">
                     <a:lnL w="12700" cap="flat" cmpd="sng" algn="ctr">
                       <a:solidFill>
                         <a:srgbClr val="CBCAC6"/>
@@ -14663,7 +14617,7 @@
                     <a:bodyPr/>
                     <a:lstStyle/>
                     <a:p>
-                      <a:pPr indent="0" marL="0">
+                      <a:pPr marL="0" indent="0">
                         <a:lnSpc>
                           <a:spcPts val="1820"/>
                         </a:lnSpc>
@@ -14687,7 +14641,7 @@
                       </a:endParaRPr>
                     </a:p>
                   </a:txBody>
-                  <a:tcPr marL="57785" marR="57785" marT="57785" marB="57785" anchor="t">
+                  <a:tcPr marL="57785" marR="57785" marT="57785" marB="57785">
                     <a:lnL w="12700" cap="flat" cmpd="sng" algn="ctr">
                       <a:solidFill>
                         <a:srgbClr val="CBCAC6"/>
@@ -14726,6 +14680,11 @@
                     </a:lnB>
                   </a:tcPr>
                 </a:tc>
+                <a:extLst>
+                  <a:ext uri="{0D108BD9-81ED-4DB2-BD59-A6C34878D82A}">
+                    <a16:rowId xmlns:a16="http://schemas.microsoft.com/office/drawing/2014/main" val="10005"/>
+                  </a:ext>
+                </a:extLst>
               </a:tr>
               <a:tr h="359271">
                 <a:tc>
@@ -14733,7 +14692,7 @@
                     <a:bodyPr/>
                     <a:lstStyle/>
                     <a:p>
-                      <a:pPr indent="0" marL="0">
+                      <a:pPr marL="0" indent="0">
                         <a:lnSpc>
                           <a:spcPts val="1820"/>
                         </a:lnSpc>
@@ -14757,7 +14716,7 @@
                       </a:endParaRPr>
                     </a:p>
                   </a:txBody>
-                  <a:tcPr marL="57785" marR="57785" marT="57785" marB="57785" anchor="t">
+                  <a:tcPr marL="57785" marR="57785" marT="57785" marB="57785">
                     <a:lnL w="12700" cap="flat" cmpd="sng" algn="ctr">
                       <a:solidFill>
                         <a:srgbClr val="CBCAC6"/>
@@ -14801,7 +14760,7 @@
                     <a:bodyPr/>
                     <a:lstStyle/>
                     <a:p>
-                      <a:pPr indent="0" marL="0">
+                      <a:pPr marL="0" indent="0">
                         <a:lnSpc>
                           <a:spcPts val="1820"/>
                         </a:lnSpc>
@@ -14825,7 +14784,7 @@
                       </a:endParaRPr>
                     </a:p>
                   </a:txBody>
-                  <a:tcPr marL="57785" marR="57785" marT="57785" marB="57785" anchor="t">
+                  <a:tcPr marL="57785" marR="57785" marT="57785" marB="57785">
                     <a:lnL w="12700" cap="flat" cmpd="sng" algn="ctr">
                       <a:solidFill>
                         <a:srgbClr val="CBCAC6"/>
@@ -14869,7 +14828,7 @@
                     <a:bodyPr/>
                     <a:lstStyle/>
                     <a:p>
-                      <a:pPr indent="0" marL="0">
+                      <a:pPr marL="0" indent="0">
                         <a:lnSpc>
                           <a:spcPts val="1820"/>
                         </a:lnSpc>
@@ -14893,7 +14852,7 @@
                       </a:endParaRPr>
                     </a:p>
                   </a:txBody>
-                  <a:tcPr marL="57785" marR="57785" marT="57785" marB="57785" anchor="t">
+                  <a:tcPr marL="57785" marR="57785" marT="57785" marB="57785">
                     <a:lnL w="12700" cap="flat" cmpd="sng" algn="ctr">
                       <a:solidFill>
                         <a:srgbClr val="CBCAC6"/>
@@ -14932,6 +14891,11 @@
                     </a:lnB>
                   </a:tcPr>
                 </a:tc>
+                <a:extLst>
+                  <a:ext uri="{0D108BD9-81ED-4DB2-BD59-A6C34878D82A}">
+                    <a16:rowId xmlns:a16="http://schemas.microsoft.com/office/drawing/2014/main" val="10006"/>
+                  </a:ext>
+                </a:extLst>
               </a:tr>
             </a:tbl>
           </a:graphicData>
@@ -14960,7 +14924,7 @@
           </a:bodyPr>
           <a:lstStyle/>
           <a:p>
-            <a:pPr algn="l" indent="0" marL="0">
+            <a:pPr marL="0" indent="0" algn="l">
               <a:lnSpc>
                 <a:spcPts val="1680"/>
               </a:lnSpc>
@@ -15004,7 +14968,7 @@
           </a:bodyPr>
           <a:lstStyle/>
           <a:p>
-            <a:pPr algn="r" indent="0" marL="0">
+            <a:pPr marL="0" indent="0" algn="r">
               <a:lnSpc>
                 <a:spcPts val="1680"/>
               </a:lnSpc>
@@ -15041,6 +15005,7 @@
         <a:solidFill>
           <a:srgbClr val="F4F1EA"/>
         </a:solidFill>
+        <a:effectLst/>
       </p:bgPr>
     </p:bg>
     <p:spTree>
@@ -15080,14 +15045,14 @@
           </a:bodyPr>
           <a:lstStyle/>
           <a:p>
-            <a:pPr algn="l" indent="0" marL="0">
+            <a:pPr marL="0" indent="0" algn="l">
               <a:lnSpc>
                 <a:spcPts val="1680"/>
               </a:lnSpc>
               <a:buNone/>
             </a:pPr>
             <a:r>
-              <a:rPr lang="en-US" sz="1200" b="1" spc="150" kern="0" dirty="0">
+              <a:rPr lang="en-US" sz="1200" b="1" kern="0" spc="150" dirty="0">
                 <a:solidFill>
                   <a:srgbClr val="0F766E"/>
                 </a:solidFill>
@@ -15124,14 +15089,14 @@
           </a:bodyPr>
           <a:lstStyle/>
           <a:p>
-            <a:pPr algn="l" indent="0" marL="0">
+            <a:pPr marL="0" indent="0" algn="l">
               <a:lnSpc>
                 <a:spcPts val="3520"/>
               </a:lnSpc>
               <a:buNone/>
             </a:pPr>
             <a:r>
-              <a:rPr lang="en-US" sz="3200" b="1" spc="-50" kern="0" dirty="0">
+              <a:rPr lang="en-US" sz="3200" b="1" kern="0" spc="-50" dirty="0">
                 <a:solidFill>
                   <a:srgbClr val="1D1C1A"/>
                 </a:solidFill>
@@ -15217,14 +15182,14 @@
           </a:bodyPr>
           <a:lstStyle/>
           <a:p>
-            <a:pPr algn="l" indent="0" marL="0">
+            <a:pPr marL="0" indent="0" algn="l">
               <a:lnSpc>
                 <a:spcPts val="1680"/>
               </a:lnSpc>
               <a:buNone/>
             </a:pPr>
             <a:r>
-              <a:rPr lang="en-US" sz="1200" b="1" spc="100" kern="0" dirty="0">
+              <a:rPr lang="en-US" sz="1200" b="1" kern="0" spc="100" dirty="0">
                 <a:solidFill>
                   <a:srgbClr val="F4F1EA"/>
                 </a:solidFill>
@@ -15261,7 +15226,7 @@
           </a:bodyPr>
           <a:lstStyle/>
           <a:p>
-            <a:pPr algn="l" indent="0" marL="0">
+            <a:pPr marL="0" indent="0" algn="l">
               <a:lnSpc>
                 <a:spcPts val="2160"/>
               </a:lnSpc>
@@ -15305,7 +15270,7 @@
           </a:bodyPr>
           <a:lstStyle/>
           <a:p>
-            <a:pPr algn="l" marL="213360" indent="-156718">
+            <a:pPr marL="213360" indent="-156718" algn="l">
               <a:lnSpc>
                 <a:spcPts val="2100"/>
               </a:lnSpc>
@@ -15326,7 +15291,7 @@
             <a:endParaRPr lang="en-US" sz="1400" dirty="0"/>
           </a:p>
           <a:p>
-            <a:pPr algn="l" marL="213360" indent="-156718">
+            <a:pPr marL="213360" indent="-156718" algn="l">
               <a:lnSpc>
                 <a:spcPts val="2100"/>
               </a:lnSpc>
@@ -15347,7 +15312,7 @@
             <a:endParaRPr lang="en-US" sz="1400" dirty="0"/>
           </a:p>
           <a:p>
-            <a:pPr algn="l" marL="213360" indent="-156718">
+            <a:pPr marL="213360" indent="-156718" algn="l">
               <a:lnSpc>
                 <a:spcPts val="2100"/>
               </a:lnSpc>
@@ -15371,15 +15336,15 @@
       </p:sp>
       <p:pic>
         <p:nvPicPr>
-          <p:cNvPr id="9" name="Image 0" descr="arrow-right">    </p:cNvPr>
+          <p:cNvPr id="9" name="Image 0" descr="arrow-right"/>
           <p:cNvPicPr>
             <a:picLocks noChangeAspect="1"/>
           </p:cNvPicPr>
           <p:nvPr/>
         </p:nvPicPr>
         <p:blipFill>
-          <a:blip r:embed="rId1"/>
-          <a:srcRect l="0" r="0" t="0" b="0"/>
+          <a:blip r:embed="rId3"/>
+          <a:srcRect/>
           <a:stretch/>
         </p:blipFill>
         <p:spPr>
@@ -15464,14 +15429,14 @@
           </a:bodyPr>
           <a:lstStyle/>
           <a:p>
-            <a:pPr algn="l" indent="0" marL="0">
+            <a:pPr marL="0" indent="0" algn="l">
               <a:lnSpc>
                 <a:spcPts val="1680"/>
               </a:lnSpc>
               <a:buNone/>
             </a:pPr>
             <a:r>
-              <a:rPr lang="en-US" sz="1200" b="1" spc="100" kern="0" dirty="0">
+              <a:rPr lang="en-US" sz="1200" b="1" kern="0" spc="100" dirty="0">
                 <a:solidFill>
                   <a:srgbClr val="F4F1EA"/>
                 </a:solidFill>
@@ -15508,7 +15473,7 @@
           </a:bodyPr>
           <a:lstStyle/>
           <a:p>
-            <a:pPr algn="l" indent="0" marL="0">
+            <a:pPr marL="0" indent="0" algn="l">
               <a:lnSpc>
                 <a:spcPts val="2160"/>
               </a:lnSpc>
@@ -15552,7 +15517,7 @@
           </a:bodyPr>
           <a:lstStyle/>
           <a:p>
-            <a:pPr algn="l" marL="213360" indent="-156718">
+            <a:pPr marL="213360" indent="-156718" algn="l">
               <a:lnSpc>
                 <a:spcPts val="2100"/>
               </a:lnSpc>
@@ -15573,7 +15538,7 @@
             <a:endParaRPr lang="en-US" sz="1400" dirty="0"/>
           </a:p>
           <a:p>
-            <a:pPr algn="l" marL="213360" indent="-156718">
+            <a:pPr marL="213360" indent="-156718" algn="l">
               <a:lnSpc>
                 <a:spcPts val="2100"/>
               </a:lnSpc>
@@ -15594,7 +15559,7 @@
             <a:endParaRPr lang="en-US" sz="1400" dirty="0"/>
           </a:p>
           <a:p>
-            <a:pPr algn="l" marL="213360" indent="-156718">
+            <a:pPr marL="213360" indent="-156718" algn="l">
               <a:lnSpc>
                 <a:spcPts val="2100"/>
               </a:lnSpc>
@@ -15618,15 +15583,15 @@
       </p:sp>
       <p:pic>
         <p:nvPicPr>
-          <p:cNvPr id="15" name="Image 1" descr="arrow-right">    </p:cNvPr>
+          <p:cNvPr id="15" name="Image 1" descr="arrow-right"/>
           <p:cNvPicPr>
             <a:picLocks noChangeAspect="1"/>
           </p:cNvPicPr>
           <p:nvPr/>
         </p:nvPicPr>
         <p:blipFill>
-          <a:blip r:embed="rId2"/>
-          <a:srcRect l="0" r="0" t="0" b="0"/>
+          <a:blip r:embed="rId3"/>
+          <a:srcRect/>
           <a:stretch/>
         </p:blipFill>
         <p:spPr>
@@ -15711,14 +15676,14 @@
           </a:bodyPr>
           <a:lstStyle/>
           <a:p>
-            <a:pPr algn="l" indent="0" marL="0">
+            <a:pPr marL="0" indent="0" algn="l">
               <a:lnSpc>
                 <a:spcPts val="1680"/>
               </a:lnSpc>
               <a:buNone/>
             </a:pPr>
             <a:r>
-              <a:rPr lang="en-US" sz="1200" b="1" spc="100" kern="0" dirty="0">
+              <a:rPr lang="en-US" sz="1200" b="1" kern="0" spc="100" dirty="0">
                 <a:solidFill>
                   <a:srgbClr val="F4F1EA"/>
                 </a:solidFill>
@@ -15755,7 +15720,7 @@
           </a:bodyPr>
           <a:lstStyle/>
           <a:p>
-            <a:pPr algn="l" indent="0" marL="0">
+            <a:pPr marL="0" indent="0" algn="l">
               <a:lnSpc>
                 <a:spcPts val="2160"/>
               </a:lnSpc>
@@ -15799,7 +15764,7 @@
           </a:bodyPr>
           <a:lstStyle/>
           <a:p>
-            <a:pPr algn="l" marL="213360" indent="-156718">
+            <a:pPr marL="213360" indent="-156718" algn="l">
               <a:lnSpc>
                 <a:spcPts val="2100"/>
               </a:lnSpc>
@@ -15820,7 +15785,7 @@
             <a:endParaRPr lang="en-US" sz="1400" dirty="0"/>
           </a:p>
           <a:p>
-            <a:pPr algn="l" marL="213360" indent="-156718">
+            <a:pPr marL="213360" indent="-156718" algn="l">
               <a:lnSpc>
                 <a:spcPts val="2100"/>
               </a:lnSpc>
@@ -15841,7 +15806,7 @@
             <a:endParaRPr lang="en-US" sz="1400" dirty="0"/>
           </a:p>
           <a:p>
-            <a:pPr algn="l" marL="213360" indent="-156718">
+            <a:pPr marL="213360" indent="-156718" algn="l">
               <a:lnSpc>
                 <a:spcPts val="2100"/>
               </a:lnSpc>
@@ -15886,7 +15851,7 @@
           </a:bodyPr>
           <a:lstStyle/>
           <a:p>
-            <a:pPr algn="l" indent="0" marL="0">
+            <a:pPr marL="0" indent="0" algn="l">
               <a:lnSpc>
                 <a:spcPts val="1960"/>
               </a:lnSpc>
@@ -15930,7 +15895,7 @@
           </a:bodyPr>
           <a:lstStyle/>
           <a:p>
-            <a:pPr algn="l" indent="0" marL="0">
+            <a:pPr marL="0" indent="0" algn="l">
               <a:lnSpc>
                 <a:spcPts val="1680"/>
               </a:lnSpc>
@@ -15974,7 +15939,7 @@
           </a:bodyPr>
           <a:lstStyle/>
           <a:p>
-            <a:pPr algn="r" indent="0" marL="0">
+            <a:pPr marL="0" indent="0" algn="r">
               <a:lnSpc>
                 <a:spcPts val="1680"/>
               </a:lnSpc>
@@ -16011,6 +15976,7 @@
         <a:solidFill>
           <a:srgbClr val="F4F1EA"/>
         </a:solidFill>
+        <a:effectLst/>
       </p:bgPr>
     </p:bg>
     <p:spTree>
@@ -16050,14 +16016,14 @@
           </a:bodyPr>
           <a:lstStyle/>
           <a:p>
-            <a:pPr algn="l" indent="0" marL="0">
+            <a:pPr marL="0" indent="0" algn="l">
               <a:lnSpc>
                 <a:spcPts val="1680"/>
               </a:lnSpc>
               <a:buNone/>
             </a:pPr>
             <a:r>
-              <a:rPr lang="en-US" sz="1200" b="1" spc="150" kern="0" dirty="0">
+              <a:rPr lang="en-US" sz="1200" b="1" kern="0" spc="150" dirty="0">
                 <a:solidFill>
                   <a:srgbClr val="0F766E"/>
                 </a:solidFill>
@@ -16094,14 +16060,14 @@
           </a:bodyPr>
           <a:lstStyle/>
           <a:p>
-            <a:pPr algn="l" indent="0" marL="0">
+            <a:pPr marL="0" indent="0" algn="l">
               <a:lnSpc>
                 <a:spcPts val="3520"/>
               </a:lnSpc>
               <a:buNone/>
             </a:pPr>
             <a:r>
-              <a:rPr lang="en-US" sz="3200" b="1" spc="-50" kern="0" dirty="0">
+              <a:rPr lang="en-US" sz="3200" b="1" kern="0" spc="-50" dirty="0">
                 <a:solidFill>
                   <a:srgbClr val="1D1C1A"/>
                 </a:solidFill>
@@ -16138,7 +16104,7 @@
           </a:bodyPr>
           <a:lstStyle/>
           <a:p>
-            <a:pPr algn="l" indent="0" marL="0">
+            <a:pPr marL="0" indent="0" algn="l">
               <a:lnSpc>
                 <a:spcPts val="1960"/>
               </a:lnSpc>
@@ -16204,7 +16170,7 @@
           </a:bodyPr>
           <a:lstStyle/>
           <a:p>
-            <a:pPr algn="l" indent="0" marL="0">
+            <a:pPr marL="0" indent="0" algn="l">
               <a:lnSpc>
                 <a:spcPts val="3520"/>
               </a:lnSpc>
@@ -16248,7 +16214,7 @@
           </a:bodyPr>
           <a:lstStyle/>
           <a:p>
-            <a:pPr algn="l" indent="0" marL="0">
+            <a:pPr marL="0" indent="0" algn="l">
               <a:lnSpc>
                 <a:spcPts val="1960"/>
               </a:lnSpc>
@@ -16292,7 +16258,7 @@
           </a:bodyPr>
           <a:lstStyle/>
           <a:p>
-            <a:pPr algn="l" indent="0" marL="0">
+            <a:pPr marL="0" indent="0" algn="l">
               <a:lnSpc>
                 <a:spcPts val="3520"/>
               </a:lnSpc>
@@ -16336,7 +16302,7 @@
           </a:bodyPr>
           <a:lstStyle/>
           <a:p>
-            <a:pPr algn="l" indent="0" marL="0">
+            <a:pPr marL="0" indent="0" algn="l">
               <a:lnSpc>
                 <a:spcPts val="1960"/>
               </a:lnSpc>
@@ -16380,7 +16346,7 @@
           </a:bodyPr>
           <a:lstStyle/>
           <a:p>
-            <a:pPr algn="l" indent="0" marL="0">
+            <a:pPr marL="0" indent="0" algn="l">
               <a:lnSpc>
                 <a:spcPts val="3520"/>
               </a:lnSpc>
@@ -16424,7 +16390,7 @@
           </a:bodyPr>
           <a:lstStyle/>
           <a:p>
-            <a:pPr algn="l" indent="0" marL="0">
+            <a:pPr marL="0" indent="0" algn="l">
               <a:lnSpc>
                 <a:spcPts val="1960"/>
               </a:lnSpc>
@@ -16481,16 +16447,34 @@
         </p:nvGraphicFramePr>
         <p:xfrm>
           <a:off x="5397500" y="1892201"/>
-          <a:ext cx="5981700" cy="2155627"/>
+          <a:ext cx="5981700" cy="2155626"/>
         </p:xfrm>
         <a:graphic>
           <a:graphicData uri="http://schemas.openxmlformats.org/drawingml/2006/table">
             <a:tbl>
               <a:tblPr/>
               <a:tblGrid>
-                <a:gridCol w="2631948"/>
-                <a:gridCol w="1674876"/>
-                <a:gridCol w="1674876"/>
+                <a:gridCol w="2631948">
+                  <a:extLst>
+                    <a:ext uri="{9D8B030D-6E8A-4147-A177-3AD203B41FA5}">
+                      <a16:colId xmlns:a16="http://schemas.microsoft.com/office/drawing/2014/main" val="20000"/>
+                    </a:ext>
+                  </a:extLst>
+                </a:gridCol>
+                <a:gridCol w="1674876">
+                  <a:extLst>
+                    <a:ext uri="{9D8B030D-6E8A-4147-A177-3AD203B41FA5}">
+                      <a16:colId xmlns:a16="http://schemas.microsoft.com/office/drawing/2014/main" val="20001"/>
+                    </a:ext>
+                  </a:extLst>
+                </a:gridCol>
+                <a:gridCol w="1674876">
+                  <a:extLst>
+                    <a:ext uri="{9D8B030D-6E8A-4147-A177-3AD203B41FA5}">
+                      <a16:colId xmlns:a16="http://schemas.microsoft.com/office/drawing/2014/main" val="20002"/>
+                    </a:ext>
+                  </a:extLst>
+                </a:gridCol>
               </a:tblGrid>
               <a:tr h="359271">
                 <a:tc>
@@ -16498,7 +16482,7 @@
                     <a:bodyPr/>
                     <a:lstStyle/>
                     <a:p>
-                      <a:pPr indent="0" marL="0">
+                      <a:pPr marL="0" indent="0">
                         <a:lnSpc>
                           <a:spcPts val="1820"/>
                         </a:lnSpc>
@@ -16522,7 +16506,7 @@
                       </a:endParaRPr>
                     </a:p>
                   </a:txBody>
-                  <a:tcPr marL="57785" marR="57785" marT="57785" marB="57785" anchor="t">
+                  <a:tcPr marL="57785" marR="57785" marT="57785" marB="57785">
                     <a:lnL w="12700" cap="flat" cmpd="sng" algn="ctr">
                       <a:solidFill>
                         <a:srgbClr val="CBCAC6"/>
@@ -16569,7 +16553,7 @@
                     <a:bodyPr/>
                     <a:lstStyle/>
                     <a:p>
-                      <a:pPr indent="0" marL="0">
+                      <a:pPr marL="0" indent="0">
                         <a:lnSpc>
                           <a:spcPts val="1820"/>
                         </a:lnSpc>
@@ -16593,7 +16577,7 @@
                       </a:endParaRPr>
                     </a:p>
                   </a:txBody>
-                  <a:tcPr marL="57785" marR="57785" marT="57785" marB="57785" anchor="t">
+                  <a:tcPr marL="57785" marR="57785" marT="57785" marB="57785">
                     <a:lnL w="12700" cap="flat" cmpd="sng" algn="ctr">
                       <a:solidFill>
                         <a:srgbClr val="1B1A18"/>
@@ -16640,7 +16624,7 @@
                     <a:bodyPr/>
                     <a:lstStyle/>
                     <a:p>
-                      <a:pPr indent="0" marL="0">
+                      <a:pPr marL="0" indent="0">
                         <a:lnSpc>
                           <a:spcPts val="1820"/>
                         </a:lnSpc>
@@ -16664,7 +16648,7 @@
                       </a:endParaRPr>
                     </a:p>
                   </a:txBody>
-                  <a:tcPr marL="57785" marR="57785" marT="57785" marB="57785" anchor="t">
+                  <a:tcPr marL="57785" marR="57785" marT="57785" marB="57785">
                     <a:lnL w="12700" cap="flat" cmpd="sng" algn="ctr">
                       <a:solidFill>
                         <a:srgbClr val="1B1A18"/>
@@ -16706,6 +16690,11 @@
                     </a:solidFill>
                   </a:tcPr>
                 </a:tc>
+                <a:extLst>
+                  <a:ext uri="{0D108BD9-81ED-4DB2-BD59-A6C34878D82A}">
+                    <a16:rowId xmlns:a16="http://schemas.microsoft.com/office/drawing/2014/main" val="10000"/>
+                  </a:ext>
+                </a:extLst>
               </a:tr>
               <a:tr h="359271">
                 <a:tc>
@@ -16713,7 +16702,7 @@
                     <a:bodyPr/>
                     <a:lstStyle/>
                     <a:p>
-                      <a:pPr indent="0" marL="0">
+                      <a:pPr marL="0" indent="0">
                         <a:lnSpc>
                           <a:spcPts val="1820"/>
                         </a:lnSpc>
@@ -16737,7 +16726,7 @@
                       </a:endParaRPr>
                     </a:p>
                   </a:txBody>
-                  <a:tcPr marL="57785" marR="57785" marT="57785" marB="57785" anchor="t">
+                  <a:tcPr marL="57785" marR="57785" marT="57785" marB="57785">
                     <a:lnL w="12700" cap="flat" cmpd="sng" algn="ctr">
                       <a:solidFill>
                         <a:srgbClr val="CBCAC6"/>
@@ -16781,7 +16770,7 @@
                     <a:bodyPr/>
                     <a:lstStyle/>
                     <a:p>
-                      <a:pPr indent="0" marL="0">
+                      <a:pPr marL="0" indent="0">
                         <a:lnSpc>
                           <a:spcPts val="1820"/>
                         </a:lnSpc>
@@ -16805,7 +16794,7 @@
                       </a:endParaRPr>
                     </a:p>
                   </a:txBody>
-                  <a:tcPr marL="57785" marR="57785" marT="57785" marB="57785" anchor="t">
+                  <a:tcPr marL="57785" marR="57785" marT="57785" marB="57785">
                     <a:lnL w="12700" cap="flat" cmpd="sng" algn="ctr">
                       <a:solidFill>
                         <a:srgbClr val="CBCAC6"/>
@@ -16849,7 +16838,7 @@
                     <a:bodyPr/>
                     <a:lstStyle/>
                     <a:p>
-                      <a:pPr indent="0" marL="0">
+                      <a:pPr marL="0" indent="0">
                         <a:lnSpc>
                           <a:spcPts val="1820"/>
                         </a:lnSpc>
@@ -16873,7 +16862,7 @@
                       </a:endParaRPr>
                     </a:p>
                   </a:txBody>
-                  <a:tcPr marL="57785" marR="57785" marT="57785" marB="57785" anchor="t">
+                  <a:tcPr marL="57785" marR="57785" marT="57785" marB="57785">
                     <a:lnL w="12700" cap="flat" cmpd="sng" algn="ctr">
                       <a:solidFill>
                         <a:srgbClr val="CBCAC6"/>
@@ -16912,6 +16901,11 @@
                     </a:lnB>
                   </a:tcPr>
                 </a:tc>
+                <a:extLst>
+                  <a:ext uri="{0D108BD9-81ED-4DB2-BD59-A6C34878D82A}">
+                    <a16:rowId xmlns:a16="http://schemas.microsoft.com/office/drawing/2014/main" val="10001"/>
+                  </a:ext>
+                </a:extLst>
               </a:tr>
               <a:tr h="359271">
                 <a:tc>
@@ -16919,7 +16913,7 @@
                     <a:bodyPr/>
                     <a:lstStyle/>
                     <a:p>
-                      <a:pPr indent="0" marL="0">
+                      <a:pPr marL="0" indent="0">
                         <a:lnSpc>
                           <a:spcPts val="1820"/>
                         </a:lnSpc>
@@ -16943,7 +16937,7 @@
                       </a:endParaRPr>
                     </a:p>
                   </a:txBody>
-                  <a:tcPr marL="57785" marR="57785" marT="57785" marB="57785" anchor="t">
+                  <a:tcPr marL="57785" marR="57785" marT="57785" marB="57785">
                     <a:lnL w="12700" cap="flat" cmpd="sng" algn="ctr">
                       <a:solidFill>
                         <a:srgbClr val="CBCAC6"/>
@@ -16987,7 +16981,7 @@
                     <a:bodyPr/>
                     <a:lstStyle/>
                     <a:p>
-                      <a:pPr indent="0" marL="0">
+                      <a:pPr marL="0" indent="0">
                         <a:lnSpc>
                           <a:spcPts val="1820"/>
                         </a:lnSpc>
@@ -17011,7 +17005,7 @@
                       </a:endParaRPr>
                     </a:p>
                   </a:txBody>
-                  <a:tcPr marL="57785" marR="57785" marT="57785" marB="57785" anchor="t">
+                  <a:tcPr marL="57785" marR="57785" marT="57785" marB="57785">
                     <a:lnL w="12700" cap="flat" cmpd="sng" algn="ctr">
                       <a:solidFill>
                         <a:srgbClr val="CBCAC6"/>
@@ -17055,7 +17049,7 @@
                     <a:bodyPr/>
                     <a:lstStyle/>
                     <a:p>
-                      <a:pPr indent="0" marL="0">
+                      <a:pPr marL="0" indent="0">
                         <a:lnSpc>
                           <a:spcPts val="1820"/>
                         </a:lnSpc>
@@ -17079,7 +17073,7 @@
                       </a:endParaRPr>
                     </a:p>
                   </a:txBody>
-                  <a:tcPr marL="57785" marR="57785" marT="57785" marB="57785" anchor="t">
+                  <a:tcPr marL="57785" marR="57785" marT="57785" marB="57785">
                     <a:lnL w="12700" cap="flat" cmpd="sng" algn="ctr">
                       <a:solidFill>
                         <a:srgbClr val="CBCAC6"/>
@@ -17118,6 +17112,11 @@
                     </a:lnB>
                   </a:tcPr>
                 </a:tc>
+                <a:extLst>
+                  <a:ext uri="{0D108BD9-81ED-4DB2-BD59-A6C34878D82A}">
+                    <a16:rowId xmlns:a16="http://schemas.microsoft.com/office/drawing/2014/main" val="10002"/>
+                  </a:ext>
+                </a:extLst>
               </a:tr>
               <a:tr h="359271">
                 <a:tc>
@@ -17125,7 +17124,7 @@
                     <a:bodyPr/>
                     <a:lstStyle/>
                     <a:p>
-                      <a:pPr indent="0" marL="0">
+                      <a:pPr marL="0" indent="0">
                         <a:lnSpc>
                           <a:spcPts val="1820"/>
                         </a:lnSpc>
@@ -17149,7 +17148,7 @@
                       </a:endParaRPr>
                     </a:p>
                   </a:txBody>
-                  <a:tcPr marL="57785" marR="57785" marT="57785" marB="57785" anchor="t">
+                  <a:tcPr marL="57785" marR="57785" marT="57785" marB="57785">
                     <a:lnL w="12700" cap="flat" cmpd="sng" algn="ctr">
                       <a:solidFill>
                         <a:srgbClr val="CBCAC6"/>
@@ -17196,7 +17195,7 @@
                     <a:bodyPr/>
                     <a:lstStyle/>
                     <a:p>
-                      <a:pPr indent="0" marL="0">
+                      <a:pPr marL="0" indent="0">
                         <a:lnSpc>
                           <a:spcPts val="1820"/>
                         </a:lnSpc>
@@ -17220,7 +17219,7 @@
                       </a:endParaRPr>
                     </a:p>
                   </a:txBody>
-                  <a:tcPr marL="57785" marR="57785" marT="57785" marB="57785" anchor="t">
+                  <a:tcPr marL="57785" marR="57785" marT="57785" marB="57785">
                     <a:lnL w="12700" cap="flat" cmpd="sng" algn="ctr">
                       <a:solidFill>
                         <a:srgbClr val="B0BCB8"/>
@@ -17267,7 +17266,7 @@
                     <a:bodyPr/>
                     <a:lstStyle/>
                     <a:p>
-                      <a:pPr indent="0" marL="0">
+                      <a:pPr marL="0" indent="0">
                         <a:lnSpc>
                           <a:spcPts val="1820"/>
                         </a:lnSpc>
@@ -17291,7 +17290,7 @@
                       </a:endParaRPr>
                     </a:p>
                   </a:txBody>
-                  <a:tcPr marL="57785" marR="57785" marT="57785" marB="57785" anchor="t">
+                  <a:tcPr marL="57785" marR="57785" marT="57785" marB="57785">
                     <a:lnL w="12700" cap="flat" cmpd="sng" algn="ctr">
                       <a:solidFill>
                         <a:srgbClr val="B0BCB8"/>
@@ -17333,6 +17332,11 @@
                     </a:solidFill>
                   </a:tcPr>
                 </a:tc>
+                <a:extLst>
+                  <a:ext uri="{0D108BD9-81ED-4DB2-BD59-A6C34878D82A}">
+                    <a16:rowId xmlns:a16="http://schemas.microsoft.com/office/drawing/2014/main" val="10003"/>
+                  </a:ext>
+                </a:extLst>
               </a:tr>
               <a:tr h="359271">
                 <a:tc>
@@ -17340,7 +17344,7 @@
                     <a:bodyPr/>
                     <a:lstStyle/>
                     <a:p>
-                      <a:pPr indent="0" marL="0">
+                      <a:pPr marL="0" indent="0">
                         <a:lnSpc>
                           <a:spcPts val="1820"/>
                         </a:lnSpc>
@@ -17364,7 +17368,7 @@
                       </a:endParaRPr>
                     </a:p>
                   </a:txBody>
-                  <a:tcPr marL="57785" marR="57785" marT="57785" marB="57785" anchor="t">
+                  <a:tcPr marL="57785" marR="57785" marT="57785" marB="57785">
                     <a:lnL w="12700" cap="flat" cmpd="sng" algn="ctr">
                       <a:solidFill>
                         <a:srgbClr val="CBCAC6"/>
@@ -17408,7 +17412,7 @@
                     <a:bodyPr/>
                     <a:lstStyle/>
                     <a:p>
-                      <a:pPr indent="0" marL="0">
+                      <a:pPr marL="0" indent="0">
                         <a:lnSpc>
                           <a:spcPts val="1820"/>
                         </a:lnSpc>
@@ -17432,7 +17436,7 @@
                       </a:endParaRPr>
                     </a:p>
                   </a:txBody>
-                  <a:tcPr marL="57785" marR="57785" marT="57785" marB="57785" anchor="t">
+                  <a:tcPr marL="57785" marR="57785" marT="57785" marB="57785">
                     <a:lnL w="12700" cap="flat" cmpd="sng" algn="ctr">
                       <a:solidFill>
                         <a:srgbClr val="CBCAC6"/>
@@ -17476,7 +17480,7 @@
                     <a:bodyPr/>
                     <a:lstStyle/>
                     <a:p>
-                      <a:pPr indent="0" marL="0">
+                      <a:pPr marL="0" indent="0">
                         <a:lnSpc>
                           <a:spcPts val="1820"/>
                         </a:lnSpc>
@@ -17500,7 +17504,7 @@
                       </a:endParaRPr>
                     </a:p>
                   </a:txBody>
-                  <a:tcPr marL="57785" marR="57785" marT="57785" marB="57785" anchor="t">
+                  <a:tcPr marL="57785" marR="57785" marT="57785" marB="57785">
                     <a:lnL w="12700" cap="flat" cmpd="sng" algn="ctr">
                       <a:solidFill>
                         <a:srgbClr val="CBCAC6"/>
@@ -17539,6 +17543,11 @@
                     </a:lnB>
                   </a:tcPr>
                 </a:tc>
+                <a:extLst>
+                  <a:ext uri="{0D108BD9-81ED-4DB2-BD59-A6C34878D82A}">
+                    <a16:rowId xmlns:a16="http://schemas.microsoft.com/office/drawing/2014/main" val="10004"/>
+                  </a:ext>
+                </a:extLst>
               </a:tr>
               <a:tr h="359271">
                 <a:tc>
@@ -17546,7 +17555,7 @@
                     <a:bodyPr/>
                     <a:lstStyle/>
                     <a:p>
-                      <a:pPr indent="0" marL="0">
+                      <a:pPr marL="0" indent="0">
                         <a:lnSpc>
                           <a:spcPts val="1820"/>
                         </a:lnSpc>
@@ -17570,7 +17579,7 @@
                       </a:endParaRPr>
                     </a:p>
                   </a:txBody>
-                  <a:tcPr marL="57785" marR="57785" marT="57785" marB="57785" anchor="t">
+                  <a:tcPr marL="57785" marR="57785" marT="57785" marB="57785">
                     <a:lnL w="12700" cap="flat" cmpd="sng" algn="ctr">
                       <a:solidFill>
                         <a:srgbClr val="CBCAC6"/>
@@ -17614,7 +17623,7 @@
                     <a:bodyPr/>
                     <a:lstStyle/>
                     <a:p>
-                      <a:pPr indent="0" marL="0">
+                      <a:pPr marL="0" indent="0">
                         <a:lnSpc>
                           <a:spcPts val="1820"/>
                         </a:lnSpc>
@@ -17638,7 +17647,7 @@
                       </a:endParaRPr>
                     </a:p>
                   </a:txBody>
-                  <a:tcPr marL="57785" marR="57785" marT="57785" marB="57785" anchor="t">
+                  <a:tcPr marL="57785" marR="57785" marT="57785" marB="57785">
                     <a:lnL w="12700" cap="flat" cmpd="sng" algn="ctr">
                       <a:solidFill>
                         <a:srgbClr val="CBCAC6"/>
@@ -17682,7 +17691,7 @@
                     <a:bodyPr/>
                     <a:lstStyle/>
                     <a:p>
-                      <a:pPr indent="0" marL="0">
+                      <a:pPr marL="0" indent="0">
                         <a:lnSpc>
                           <a:spcPts val="1820"/>
                         </a:lnSpc>
@@ -17706,7 +17715,7 @@
                       </a:endParaRPr>
                     </a:p>
                   </a:txBody>
-                  <a:tcPr marL="57785" marR="57785" marT="57785" marB="57785" anchor="t">
+                  <a:tcPr marL="57785" marR="57785" marT="57785" marB="57785">
                     <a:lnL w="12700" cap="flat" cmpd="sng" algn="ctr">
                       <a:solidFill>
                         <a:srgbClr val="CBCAC6"/>
@@ -17745,6 +17754,11 @@
                     </a:lnB>
                   </a:tcPr>
                 </a:tc>
+                <a:extLst>
+                  <a:ext uri="{0D108BD9-81ED-4DB2-BD59-A6C34878D82A}">
+                    <a16:rowId xmlns:a16="http://schemas.microsoft.com/office/drawing/2014/main" val="10005"/>
+                  </a:ext>
+                </a:extLst>
               </a:tr>
             </a:tbl>
           </a:graphicData>
@@ -17773,7 +17787,7 @@
           </a:bodyPr>
           <a:lstStyle/>
           <a:p>
-            <a:pPr algn="l" indent="0" marL="0">
+            <a:pPr marL="0" indent="0" algn="l">
               <a:lnSpc>
                 <a:spcPts val="1680"/>
               </a:lnSpc>
@@ -17817,7 +17831,7 @@
           </a:bodyPr>
           <a:lstStyle/>
           <a:p>
-            <a:pPr algn="l" indent="0" marL="0">
+            <a:pPr marL="0" indent="0" algn="l">
               <a:lnSpc>
                 <a:spcPts val="1680"/>
               </a:lnSpc>
@@ -17861,7 +17875,7 @@
           </a:bodyPr>
           <a:lstStyle/>
           <a:p>
-            <a:pPr algn="r" indent="0" marL="0">
+            <a:pPr marL="0" indent="0" algn="r">
               <a:lnSpc>
                 <a:spcPts val="1680"/>
               </a:lnSpc>
@@ -18183,4 +18197,299 @@
     </a:ext>
   </a:extLst>
 </a:theme>
+</file>
+
+<file path=ppt/theme/theme2.xml><?xml version="1.0" encoding="utf-8"?>
+<a:theme xmlns:a="http://schemas.openxmlformats.org/drawingml/2006/main" name="Office Theme">
+  <a:themeElements>
+    <a:clrScheme name="Office">
+      <a:dk1>
+        <a:sysClr val="windowText" lastClr="000000"/>
+      </a:dk1>
+      <a:lt1>
+        <a:sysClr val="window" lastClr="FFFFFF"/>
+      </a:lt1>
+      <a:dk2>
+        <a:srgbClr val="44546A"/>
+      </a:dk2>
+      <a:lt2>
+        <a:srgbClr val="E7E6E6"/>
+      </a:lt2>
+      <a:accent1>
+        <a:srgbClr val="4472C4"/>
+      </a:accent1>
+      <a:accent2>
+        <a:srgbClr val="ED7D31"/>
+      </a:accent2>
+      <a:accent3>
+        <a:srgbClr val="A5A5A5"/>
+      </a:accent3>
+      <a:accent4>
+        <a:srgbClr val="FFC000"/>
+      </a:accent4>
+      <a:accent5>
+        <a:srgbClr val="5B9BD5"/>
+      </a:accent5>
+      <a:accent6>
+        <a:srgbClr val="70AD47"/>
+      </a:accent6>
+      <a:hlink>
+        <a:srgbClr val="0563C1"/>
+      </a:hlink>
+      <a:folHlink>
+        <a:srgbClr val="954F72"/>
+      </a:folHlink>
+    </a:clrScheme>
+    <a:fontScheme name="Office">
+      <a:majorFont>
+        <a:latin typeface="Calibri Light" panose="020F0302020204030204"/>
+        <a:ea typeface=""/>
+        <a:cs typeface=""/>
+        <a:font script="Jpan" typeface="游ゴシック Light"/>
+        <a:font script="Hang" typeface="맑은 고딕"/>
+        <a:font script="Hans" typeface="等线 Light"/>
+        <a:font script="Hant" typeface="新細明體"/>
+        <a:font script="Arab" typeface="Times New Roman"/>
+        <a:font script="Hebr" typeface="Times New Roman"/>
+        <a:font script="Thai" typeface="Angsana New"/>
+        <a:font script="Ethi" typeface="Nyala"/>
+        <a:font script="Beng" typeface="Vrinda"/>
+        <a:font script="Gujr" typeface="Shruti"/>
+        <a:font script="Khmr" typeface="MoolBoran"/>
+        <a:font script="Knda" typeface="Tunga"/>
+        <a:font script="Guru" typeface="Raavi"/>
+        <a:font script="Cans" typeface="Euphemia"/>
+        <a:font script="Cher" typeface="Plantagenet Cherokee"/>
+        <a:font script="Yiii" typeface="Microsoft Yi Baiti"/>
+        <a:font script="Tibt" typeface="Microsoft Himalaya"/>
+        <a:font script="Thaa" typeface="MV Boli"/>
+        <a:font script="Deva" typeface="Mangal"/>
+        <a:font script="Telu" typeface="Gautami"/>
+        <a:font script="Taml" typeface="Latha"/>
+        <a:font script="Syrc" typeface="Estrangelo Edessa"/>
+        <a:font script="Orya" typeface="Kalinga"/>
+        <a:font script="Mlym" typeface="Kartika"/>
+        <a:font script="Laoo" typeface="DokChampa"/>
+        <a:font script="Sinh" typeface="Iskoola Pota"/>
+        <a:font script="Mong" typeface="Mongolian Baiti"/>
+        <a:font script="Viet" typeface="Times New Roman"/>
+        <a:font script="Uigh" typeface="Microsoft Uighur"/>
+        <a:font script="Geor" typeface="Sylfaen"/>
+        <a:font script="Armn" typeface="Arial"/>
+        <a:font script="Bugi" typeface="Leelawadee UI"/>
+        <a:font script="Bopo" typeface="Microsoft JhengHei"/>
+        <a:font script="Java" typeface="Javanese Text"/>
+        <a:font script="Lisu" typeface="Segoe UI"/>
+        <a:font script="Mymr" typeface="Myanmar Text"/>
+        <a:font script="Nkoo" typeface="Ebrima"/>
+        <a:font script="Olck" typeface="Nirmala UI"/>
+        <a:font script="Osma" typeface="Ebrima"/>
+        <a:font script="Phag" typeface="Phagspa"/>
+        <a:font script="Syrn" typeface="Estrangelo Edessa"/>
+        <a:font script="Syrj" typeface="Estrangelo Edessa"/>
+        <a:font script="Syre" typeface="Estrangelo Edessa"/>
+        <a:font script="Sora" typeface="Nirmala UI"/>
+        <a:font script="Tale" typeface="Microsoft Tai Le"/>
+        <a:font script="Talu" typeface="Microsoft New Tai Lue"/>
+        <a:font script="Tfng" typeface="Ebrima"/>
+      </a:majorFont>
+      <a:minorFont>
+        <a:latin typeface="Calibri" panose="020F0502020204030204"/>
+        <a:ea typeface=""/>
+        <a:cs typeface=""/>
+        <a:font script="Jpan" typeface="游ゴシック"/>
+        <a:font script="Hang" typeface="맑은 고딕"/>
+        <a:font script="Hans" typeface="等线"/>
+        <a:font script="Hant" typeface="新細明體"/>
+        <a:font script="Arab" typeface="Arial"/>
+        <a:font script="Hebr" typeface="Arial"/>
+        <a:font script="Thai" typeface="Cordia New"/>
+        <a:font script="Ethi" typeface="Nyala"/>
+        <a:font script="Beng" typeface="Vrinda"/>
+        <a:font script="Gujr" typeface="Shruti"/>
+        <a:font script="Khmr" typeface="DaunPenh"/>
+        <a:font script="Knda" typeface="Tunga"/>
+        <a:font script="Guru" typeface="Raavi"/>
+        <a:font script="Cans" typeface="Euphemia"/>
+        <a:font script="Cher" typeface="Plantagenet Cherokee"/>
+        <a:font script="Yiii" typeface="Microsoft Yi Baiti"/>
+        <a:font script="Tibt" typeface="Microsoft Himalaya"/>
+        <a:font script="Thaa" typeface="MV Boli"/>
+        <a:font script="Deva" typeface="Mangal"/>
+        <a:font script="Telu" typeface="Gautami"/>
+        <a:font script="Taml" typeface="Latha"/>
+        <a:font script="Syrc" typeface="Estrangelo Edessa"/>
+        <a:font script="Orya" typeface="Kalinga"/>
+        <a:font script="Mlym" typeface="Kartika"/>
+        <a:font script="Laoo" typeface="DokChampa"/>
+        <a:font script="Sinh" typeface="Iskoola Pota"/>
+        <a:font script="Mong" typeface="Mongolian Baiti"/>
+        <a:font script="Viet" typeface="Arial"/>
+        <a:font script="Uigh" typeface="Microsoft Uighur"/>
+        <a:font script="Geor" typeface="Sylfaen"/>
+        <a:font script="Armn" typeface="Arial"/>
+        <a:font script="Bugi" typeface="Leelawadee UI"/>
+        <a:font script="Bopo" typeface="Microsoft JhengHei"/>
+        <a:font script="Java" typeface="Javanese Text"/>
+        <a:font script="Lisu" typeface="Segoe UI"/>
+        <a:font script="Mymr" typeface="Myanmar Text"/>
+        <a:font script="Nkoo" typeface="Ebrima"/>
+        <a:font script="Olck" typeface="Nirmala UI"/>
+        <a:font script="Osma" typeface="Ebrima"/>
+        <a:font script="Phag" typeface="Phagspa"/>
+        <a:font script="Syrn" typeface="Estrangelo Edessa"/>
+        <a:font script="Syrj" typeface="Estrangelo Edessa"/>
+        <a:font script="Syre" typeface="Estrangelo Edessa"/>
+        <a:font script="Sora" typeface="Nirmala UI"/>
+        <a:font script="Tale" typeface="Microsoft Tai Le"/>
+        <a:font script="Talu" typeface="Microsoft New Tai Lue"/>
+        <a:font script="Tfng" typeface="Ebrima"/>
+      </a:minorFont>
+    </a:fontScheme>
+    <a:fmtScheme name="Office">
+      <a:fillStyleLst>
+        <a:solidFill>
+          <a:schemeClr val="phClr"/>
+        </a:solidFill>
+        <a:gradFill rotWithShape="1">
+          <a:gsLst>
+            <a:gs pos="0">
+              <a:schemeClr val="phClr">
+                <a:lumMod val="110000"/>
+                <a:satMod val="105000"/>
+                <a:tint val="67000"/>
+              </a:schemeClr>
+            </a:gs>
+            <a:gs pos="50000">
+              <a:schemeClr val="phClr">
+                <a:lumMod val="105000"/>
+                <a:satMod val="103000"/>
+                <a:tint val="73000"/>
+              </a:schemeClr>
+            </a:gs>
+            <a:gs pos="100000">
+              <a:schemeClr val="phClr">
+                <a:lumMod val="105000"/>
+                <a:satMod val="109000"/>
+                <a:tint val="81000"/>
+              </a:schemeClr>
+            </a:gs>
+          </a:gsLst>
+          <a:lin ang="5400000" scaled="0"/>
+        </a:gradFill>
+        <a:gradFill rotWithShape="1">
+          <a:gsLst>
+            <a:gs pos="0">
+              <a:schemeClr val="phClr">
+                <a:satMod val="103000"/>
+                <a:lumMod val="102000"/>
+                <a:tint val="94000"/>
+              </a:schemeClr>
+            </a:gs>
+            <a:gs pos="50000">
+              <a:schemeClr val="phClr">
+                <a:satMod val="110000"/>
+                <a:lumMod val="100000"/>
+                <a:shade val="100000"/>
+              </a:schemeClr>
+            </a:gs>
+            <a:gs pos="100000">
+              <a:schemeClr val="phClr">
+                <a:lumMod val="99000"/>
+                <a:satMod val="120000"/>
+                <a:shade val="78000"/>
+              </a:schemeClr>
+            </a:gs>
+          </a:gsLst>
+          <a:lin ang="5400000" scaled="0"/>
+        </a:gradFill>
+      </a:fillStyleLst>
+      <a:lnStyleLst>
+        <a:ln w="6350" cap="flat" cmpd="sng" algn="ctr">
+          <a:solidFill>
+            <a:schemeClr val="phClr"/>
+          </a:solidFill>
+          <a:prstDash val="solid"/>
+          <a:miter lim="800000"/>
+        </a:ln>
+        <a:ln w="12700" cap="flat" cmpd="sng" algn="ctr">
+          <a:solidFill>
+            <a:schemeClr val="phClr"/>
+          </a:solidFill>
+          <a:prstDash val="solid"/>
+          <a:miter lim="800000"/>
+        </a:ln>
+        <a:ln w="19050" cap="flat" cmpd="sng" algn="ctr">
+          <a:solidFill>
+            <a:schemeClr val="phClr"/>
+          </a:solidFill>
+          <a:prstDash val="solid"/>
+          <a:miter lim="800000"/>
+        </a:ln>
+      </a:lnStyleLst>
+      <a:effectStyleLst>
+        <a:effectStyle>
+          <a:effectLst/>
+        </a:effectStyle>
+        <a:effectStyle>
+          <a:effectLst/>
+        </a:effectStyle>
+        <a:effectStyle>
+          <a:effectLst>
+            <a:outerShdw blurRad="57150" dist="19050" dir="5400000" algn="ctr" rotWithShape="0">
+              <a:srgbClr val="000000">
+                <a:alpha val="63000"/>
+              </a:srgbClr>
+            </a:outerShdw>
+          </a:effectLst>
+        </a:effectStyle>
+      </a:effectStyleLst>
+      <a:bgFillStyleLst>
+        <a:solidFill>
+          <a:schemeClr val="phClr"/>
+        </a:solidFill>
+        <a:solidFill>
+          <a:schemeClr val="phClr">
+            <a:tint val="95000"/>
+            <a:satMod val="170000"/>
+          </a:schemeClr>
+        </a:solidFill>
+        <a:gradFill rotWithShape="1">
+          <a:gsLst>
+            <a:gs pos="0">
+              <a:schemeClr val="phClr">
+                <a:tint val="93000"/>
+                <a:satMod val="150000"/>
+                <a:shade val="98000"/>
+                <a:lumMod val="102000"/>
+              </a:schemeClr>
+            </a:gs>
+            <a:gs pos="50000">
+              <a:schemeClr val="phClr">
+                <a:tint val="98000"/>
+                <a:satMod val="130000"/>
+                <a:shade val="90000"/>
+                <a:lumMod val="103000"/>
+              </a:schemeClr>
+            </a:gs>
+            <a:gs pos="100000">
+              <a:schemeClr val="phClr">
+                <a:shade val="63000"/>
+                <a:satMod val="120000"/>
+              </a:schemeClr>
+            </a:gs>
+          </a:gsLst>
+          <a:lin ang="5400000" scaled="0"/>
+        </a:gradFill>
+      </a:bgFillStyleLst>
+    </a:fmtScheme>
+  </a:themeElements>
+  <a:objectDefaults/>
+  <a:extraClrSchemeLst/>
+  <a:extLst>
+    <a:ext uri="{05A4C25C-085E-4340-85A3-A5531E510DB2}">
+      <thm15:themeFamily xmlns:thm15="http://schemas.microsoft.com/office/thememl/2012/main" name="Office Theme" id="{62F939B6-93AF-4DB8-9C6B-D6C7DFDC589F}" vid="{4A3C46E8-61CC-4603-A589-7422A47A8E4A}"/>
+    </a:ext>
+  </a:extLst>
+</a:theme>
 </file>